--- a/math-practice/docs/social/social_preview_combat_style.pptx
+++ b/math-practice/docs/social/social_preview_combat_style.pptx
@@ -5,11 +5,12 @@
     <p:sldMasterId id="2147483660" r:id="rId1"/>
   </p:sldMasterIdLst>
   <p:notesMasterIdLst>
-    <p:notesMasterId r:id="rId4"/>
+    <p:notesMasterId r:id="rId5"/>
   </p:notesMasterIdLst>
   <p:sldIdLst>
-    <p:sldId id="256" r:id="rId2"/>
-    <p:sldId id="257" r:id="rId3"/>
+    <p:sldId id="257" r:id="rId2"/>
+    <p:sldId id="259" r:id="rId3"/>
+    <p:sldId id="258" r:id="rId4"/>
   </p:sldIdLst>
   <p:sldSz cx="11430000" cy="6000750"/>
   <p:notesSz cx="6858000" cy="9144000"/>
@@ -491,90 +492,6 @@
   <p:cSld>
     <p:spTree>
       <p:nvGrpSpPr>
-        <p:cNvPr id="1" name=""/>
-        <p:cNvGrpSpPr/>
-        <p:nvPr/>
-      </p:nvGrpSpPr>
-      <p:grpSpPr>
-        <a:xfrm>
-          <a:off x="0" y="0"/>
-          <a:ext cx="0" cy="0"/>
-          <a:chOff x="0" y="0"/>
-          <a:chExt cx="0" cy="0"/>
-        </a:xfrm>
-      </p:grpSpPr>
-      <p:sp>
-        <p:nvSpPr>
-          <p:cNvPr id="2" name="投影片影像版面配置區 1"/>
-          <p:cNvSpPr>
-            <a:spLocks noGrp="1" noRot="1" noChangeAspect="1"/>
-          </p:cNvSpPr>
-          <p:nvPr>
-            <p:ph type="sldImg"/>
-          </p:nvPr>
-        </p:nvSpPr>
-        <p:spPr/>
-      </p:sp>
-      <p:sp>
-        <p:nvSpPr>
-          <p:cNvPr id="3" name="備忘稿版面配置區 2"/>
-          <p:cNvSpPr>
-            <a:spLocks noGrp="1"/>
-          </p:cNvSpPr>
-          <p:nvPr>
-            <p:ph type="body" idx="1"/>
-          </p:nvPr>
-        </p:nvSpPr>
-        <p:spPr/>
-        <p:txBody>
-          <a:bodyPr/>
-          <a:lstStyle/>
-          <a:p>
-            <a:endParaRPr lang="zh-TW" altLang="en-US" dirty="0"/>
-          </a:p>
-        </p:txBody>
-      </p:sp>
-      <p:sp>
-        <p:nvSpPr>
-          <p:cNvPr id="4" name="投影片編號版面配置區 3"/>
-          <p:cNvSpPr>
-            <a:spLocks noGrp="1"/>
-          </p:cNvSpPr>
-          <p:nvPr>
-            <p:ph type="sldNum" sz="quarter" idx="5"/>
-          </p:nvPr>
-        </p:nvSpPr>
-        <p:spPr/>
-        <p:txBody>
-          <a:bodyPr/>
-          <a:lstStyle/>
-          <a:p>
-            <a:fld id="{1AFBDA3E-6826-4241-957B-2DAC5EBA8E20}" type="slidenum">
-              <a:rPr lang="zh-TW" altLang="en-US" smtClean="0"/>
-              <a:t>1</a:t>
-            </a:fld>
-            <a:endParaRPr lang="zh-TW" altLang="en-US"/>
-          </a:p>
-        </p:txBody>
-      </p:sp>
-    </p:spTree>
-    <p:extLst>
-      <p:ext uri="{BB962C8B-B14F-4D97-AF65-F5344CB8AC3E}">
-        <p14:creationId xmlns:p14="http://schemas.microsoft.com/office/powerpoint/2010/main" val="769139773"/>
-      </p:ext>
-    </p:extLst>
-  </p:cSld>
-  <p:clrMapOvr>
-    <a:masterClrMapping/>
-  </p:clrMapOvr>
-</p:notes>
-</file>
-
-<file path=ppt/notesSlides/notesSlide2.xml><?xml version="1.0" encoding="utf-8"?>
-<p:notes xmlns:a="http://schemas.openxmlformats.org/drawingml/2006/main" xmlns:r="http://schemas.openxmlformats.org/officeDocument/2006/relationships" xmlns:p="http://schemas.openxmlformats.org/presentationml/2006/main">
-  <p:cSld>
-    <p:spTree>
-      <p:nvGrpSpPr>
         <p:cNvPr id="1" name="">
           <a:extLst>
             <a:ext uri="{FF2B5EF4-FFF2-40B4-BE49-F238E27FC236}">
@@ -659,7 +576,7 @@
           <a:p>
             <a:fld id="{1AFBDA3E-6826-4241-957B-2DAC5EBA8E20}" type="slidenum">
               <a:rPr lang="zh-TW" altLang="en-US" smtClean="0"/>
-              <a:t>2</a:t>
+              <a:t>1</a:t>
             </a:fld>
             <a:endParaRPr lang="zh-TW" altLang="en-US"/>
           </a:p>
@@ -669,6 +586,222 @@
     <p:extLst>
       <p:ext uri="{BB962C8B-B14F-4D97-AF65-F5344CB8AC3E}">
         <p14:creationId xmlns:p14="http://schemas.microsoft.com/office/powerpoint/2010/main" val="412580909"/>
+      </p:ext>
+    </p:extLst>
+  </p:cSld>
+  <p:clrMapOvr>
+    <a:masterClrMapping/>
+  </p:clrMapOvr>
+</p:notes>
+</file>
+
+<file path=ppt/notesSlides/notesSlide2.xml><?xml version="1.0" encoding="utf-8"?>
+<p:notes xmlns:a="http://schemas.openxmlformats.org/drawingml/2006/main" xmlns:r="http://schemas.openxmlformats.org/officeDocument/2006/relationships" xmlns:p="http://schemas.openxmlformats.org/presentationml/2006/main">
+  <p:cSld>
+    <p:spTree>
+      <p:nvGrpSpPr>
+        <p:cNvPr id="1" name="">
+          <a:extLst>
+            <a:ext uri="{FF2B5EF4-FFF2-40B4-BE49-F238E27FC236}">
+              <a16:creationId xmlns:a16="http://schemas.microsoft.com/office/drawing/2014/main" id="{F02E5790-F9E7-7B72-FD7A-BA1612CF25B0}"/>
+            </a:ext>
+          </a:extLst>
+        </p:cNvPr>
+        <p:cNvGrpSpPr/>
+        <p:nvPr/>
+      </p:nvGrpSpPr>
+      <p:grpSpPr>
+        <a:xfrm>
+          <a:off x="0" y="0"/>
+          <a:ext cx="0" cy="0"/>
+          <a:chOff x="0" y="0"/>
+          <a:chExt cx="0" cy="0"/>
+        </a:xfrm>
+      </p:grpSpPr>
+      <p:sp>
+        <p:nvSpPr>
+          <p:cNvPr id="2" name="投影片影像版面配置區 1">
+            <a:extLst>
+              <a:ext uri="{FF2B5EF4-FFF2-40B4-BE49-F238E27FC236}">
+                <a16:creationId xmlns:a16="http://schemas.microsoft.com/office/drawing/2014/main" id="{9E27997B-5FDB-32D0-35F1-9E92CE55D786}"/>
+              </a:ext>
+            </a:extLst>
+          </p:cNvPr>
+          <p:cNvSpPr>
+            <a:spLocks noGrp="1" noRot="1" noChangeAspect="1"/>
+          </p:cNvSpPr>
+          <p:nvPr>
+            <p:ph type="sldImg"/>
+          </p:nvPr>
+        </p:nvSpPr>
+        <p:spPr/>
+      </p:sp>
+      <p:sp>
+        <p:nvSpPr>
+          <p:cNvPr id="3" name="備忘稿版面配置區 2">
+            <a:extLst>
+              <a:ext uri="{FF2B5EF4-FFF2-40B4-BE49-F238E27FC236}">
+                <a16:creationId xmlns:a16="http://schemas.microsoft.com/office/drawing/2014/main" id="{A7B830E6-664A-1AC0-9B8E-9586D161DB11}"/>
+              </a:ext>
+            </a:extLst>
+          </p:cNvPr>
+          <p:cNvSpPr>
+            <a:spLocks noGrp="1"/>
+          </p:cNvSpPr>
+          <p:nvPr>
+            <p:ph type="body" idx="1"/>
+          </p:nvPr>
+        </p:nvSpPr>
+        <p:spPr/>
+        <p:txBody>
+          <a:bodyPr/>
+          <a:lstStyle/>
+          <a:p>
+            <a:endParaRPr lang="zh-TW" altLang="en-US" dirty="0"/>
+          </a:p>
+        </p:txBody>
+      </p:sp>
+      <p:sp>
+        <p:nvSpPr>
+          <p:cNvPr id="4" name="投影片編號版面配置區 3">
+            <a:extLst>
+              <a:ext uri="{FF2B5EF4-FFF2-40B4-BE49-F238E27FC236}">
+                <a16:creationId xmlns:a16="http://schemas.microsoft.com/office/drawing/2014/main" id="{97859A96-31A8-B7FD-B6AA-A95C1EA87BE1}"/>
+              </a:ext>
+            </a:extLst>
+          </p:cNvPr>
+          <p:cNvSpPr>
+            <a:spLocks noGrp="1"/>
+          </p:cNvSpPr>
+          <p:nvPr>
+            <p:ph type="sldNum" sz="quarter" idx="5"/>
+          </p:nvPr>
+        </p:nvSpPr>
+        <p:spPr/>
+        <p:txBody>
+          <a:bodyPr/>
+          <a:lstStyle/>
+          <a:p>
+            <a:fld id="{1AFBDA3E-6826-4241-957B-2DAC5EBA8E20}" type="slidenum">
+              <a:rPr lang="zh-TW" altLang="en-US" smtClean="0"/>
+              <a:t>2</a:t>
+            </a:fld>
+            <a:endParaRPr lang="zh-TW" altLang="en-US"/>
+          </a:p>
+        </p:txBody>
+      </p:sp>
+    </p:spTree>
+    <p:extLst>
+      <p:ext uri="{BB962C8B-B14F-4D97-AF65-F5344CB8AC3E}">
+        <p14:creationId xmlns:p14="http://schemas.microsoft.com/office/powerpoint/2010/main" val="59398334"/>
+      </p:ext>
+    </p:extLst>
+  </p:cSld>
+  <p:clrMapOvr>
+    <a:masterClrMapping/>
+  </p:clrMapOvr>
+</p:notes>
+</file>
+
+<file path=ppt/notesSlides/notesSlide3.xml><?xml version="1.0" encoding="utf-8"?>
+<p:notes xmlns:a="http://schemas.openxmlformats.org/drawingml/2006/main" xmlns:r="http://schemas.openxmlformats.org/officeDocument/2006/relationships" xmlns:p="http://schemas.openxmlformats.org/presentationml/2006/main">
+  <p:cSld>
+    <p:spTree>
+      <p:nvGrpSpPr>
+        <p:cNvPr id="1" name="">
+          <a:extLst>
+            <a:ext uri="{FF2B5EF4-FFF2-40B4-BE49-F238E27FC236}">
+              <a16:creationId xmlns:a16="http://schemas.microsoft.com/office/drawing/2014/main" id="{C2D8C4A5-7334-E2C4-9DF3-19555D3904D1}"/>
+            </a:ext>
+          </a:extLst>
+        </p:cNvPr>
+        <p:cNvGrpSpPr/>
+        <p:nvPr/>
+      </p:nvGrpSpPr>
+      <p:grpSpPr>
+        <a:xfrm>
+          <a:off x="0" y="0"/>
+          <a:ext cx="0" cy="0"/>
+          <a:chOff x="0" y="0"/>
+          <a:chExt cx="0" cy="0"/>
+        </a:xfrm>
+      </p:grpSpPr>
+      <p:sp>
+        <p:nvSpPr>
+          <p:cNvPr id="2" name="投影片影像版面配置區 1">
+            <a:extLst>
+              <a:ext uri="{FF2B5EF4-FFF2-40B4-BE49-F238E27FC236}">
+                <a16:creationId xmlns:a16="http://schemas.microsoft.com/office/drawing/2014/main" id="{D9ECDFF8-4A50-CFB5-FEEE-170BA9CAD655}"/>
+              </a:ext>
+            </a:extLst>
+          </p:cNvPr>
+          <p:cNvSpPr>
+            <a:spLocks noGrp="1" noRot="1" noChangeAspect="1"/>
+          </p:cNvSpPr>
+          <p:nvPr>
+            <p:ph type="sldImg"/>
+          </p:nvPr>
+        </p:nvSpPr>
+        <p:spPr/>
+      </p:sp>
+      <p:sp>
+        <p:nvSpPr>
+          <p:cNvPr id="3" name="備忘稿版面配置區 2">
+            <a:extLst>
+              <a:ext uri="{FF2B5EF4-FFF2-40B4-BE49-F238E27FC236}">
+                <a16:creationId xmlns:a16="http://schemas.microsoft.com/office/drawing/2014/main" id="{4EEF51C2-0393-A1BF-DD48-9FFC32613775}"/>
+              </a:ext>
+            </a:extLst>
+          </p:cNvPr>
+          <p:cNvSpPr>
+            <a:spLocks noGrp="1"/>
+          </p:cNvSpPr>
+          <p:nvPr>
+            <p:ph type="body" idx="1"/>
+          </p:nvPr>
+        </p:nvSpPr>
+        <p:spPr/>
+        <p:txBody>
+          <a:bodyPr/>
+          <a:lstStyle/>
+          <a:p>
+            <a:endParaRPr lang="zh-TW" altLang="en-US" dirty="0"/>
+          </a:p>
+        </p:txBody>
+      </p:sp>
+      <p:sp>
+        <p:nvSpPr>
+          <p:cNvPr id="4" name="投影片編號版面配置區 3">
+            <a:extLst>
+              <a:ext uri="{FF2B5EF4-FFF2-40B4-BE49-F238E27FC236}">
+                <a16:creationId xmlns:a16="http://schemas.microsoft.com/office/drawing/2014/main" id="{6180560B-C812-88D0-57EE-D65166068774}"/>
+              </a:ext>
+            </a:extLst>
+          </p:cNvPr>
+          <p:cNvSpPr>
+            <a:spLocks noGrp="1"/>
+          </p:cNvSpPr>
+          <p:nvPr>
+            <p:ph type="sldNum" sz="quarter" idx="5"/>
+          </p:nvPr>
+        </p:nvSpPr>
+        <p:spPr/>
+        <p:txBody>
+          <a:bodyPr/>
+          <a:lstStyle/>
+          <a:p>
+            <a:fld id="{1AFBDA3E-6826-4241-957B-2DAC5EBA8E20}" type="slidenum">
+              <a:rPr lang="zh-TW" altLang="en-US" smtClean="0"/>
+              <a:t>3</a:t>
+            </a:fld>
+            <a:endParaRPr lang="zh-TW" altLang="en-US"/>
+          </a:p>
+        </p:txBody>
+      </p:sp>
+    </p:spTree>
+    <p:extLst>
+      <p:ext uri="{BB962C8B-B14F-4D97-AF65-F5344CB8AC3E}">
+        <p14:creationId xmlns:p14="http://schemas.microsoft.com/office/powerpoint/2010/main" val="736669085"/>
       </p:ext>
     </p:extLst>
   </p:cSld>
@@ -809,7 +942,7 @@
           <a:p>
             <a:fld id="{F2A253DC-669B-41BC-84D9-7F457E7088E2}" type="datetimeFigureOut">
               <a:rPr lang="zh-TW" altLang="en-US" smtClean="0"/>
-              <a:t>2026/2/25</a:t>
+              <a:t>2026/2/26</a:t>
             </a:fld>
             <a:endParaRPr lang="zh-TW" altLang="en-US"/>
           </a:p>
@@ -979,7 +1112,7 @@
           <a:p>
             <a:fld id="{F2A253DC-669B-41BC-84D9-7F457E7088E2}" type="datetimeFigureOut">
               <a:rPr lang="zh-TW" altLang="en-US" smtClean="0"/>
-              <a:t>2026/2/25</a:t>
+              <a:t>2026/2/26</a:t>
             </a:fld>
             <a:endParaRPr lang="zh-TW" altLang="en-US"/>
           </a:p>
@@ -1159,7 +1292,7 @@
           <a:p>
             <a:fld id="{F2A253DC-669B-41BC-84D9-7F457E7088E2}" type="datetimeFigureOut">
               <a:rPr lang="zh-TW" altLang="en-US" smtClean="0"/>
-              <a:t>2026/2/25</a:t>
+              <a:t>2026/2/26</a:t>
             </a:fld>
             <a:endParaRPr lang="zh-TW" altLang="en-US"/>
           </a:p>
@@ -1329,7 +1462,7 @@
           <a:p>
             <a:fld id="{F2A253DC-669B-41BC-84D9-7F457E7088E2}" type="datetimeFigureOut">
               <a:rPr lang="zh-TW" altLang="en-US" smtClean="0"/>
-              <a:t>2026/2/25</a:t>
+              <a:t>2026/2/26</a:t>
             </a:fld>
             <a:endParaRPr lang="zh-TW" altLang="en-US"/>
           </a:p>
@@ -1575,7 +1708,7 @@
           <a:p>
             <a:fld id="{F2A253DC-669B-41BC-84D9-7F457E7088E2}" type="datetimeFigureOut">
               <a:rPr lang="zh-TW" altLang="en-US" smtClean="0"/>
-              <a:t>2026/2/25</a:t>
+              <a:t>2026/2/26</a:t>
             </a:fld>
             <a:endParaRPr lang="zh-TW" altLang="en-US"/>
           </a:p>
@@ -1807,7 +1940,7 @@
           <a:p>
             <a:fld id="{F2A253DC-669B-41BC-84D9-7F457E7088E2}" type="datetimeFigureOut">
               <a:rPr lang="zh-TW" altLang="en-US" smtClean="0"/>
-              <a:t>2026/2/25</a:t>
+              <a:t>2026/2/26</a:t>
             </a:fld>
             <a:endParaRPr lang="zh-TW" altLang="en-US"/>
           </a:p>
@@ -2174,7 +2307,7 @@
           <a:p>
             <a:fld id="{F2A253DC-669B-41BC-84D9-7F457E7088E2}" type="datetimeFigureOut">
               <a:rPr lang="zh-TW" altLang="en-US" smtClean="0"/>
-              <a:t>2026/2/25</a:t>
+              <a:t>2026/2/26</a:t>
             </a:fld>
             <a:endParaRPr lang="zh-TW" altLang="en-US"/>
           </a:p>
@@ -2292,7 +2425,7 @@
           <a:p>
             <a:fld id="{F2A253DC-669B-41BC-84D9-7F457E7088E2}" type="datetimeFigureOut">
               <a:rPr lang="zh-TW" altLang="en-US" smtClean="0"/>
-              <a:t>2026/2/25</a:t>
+              <a:t>2026/2/26</a:t>
             </a:fld>
             <a:endParaRPr lang="zh-TW" altLang="en-US"/>
           </a:p>
@@ -2387,7 +2520,7 @@
           <a:p>
             <a:fld id="{F2A253DC-669B-41BC-84D9-7F457E7088E2}" type="datetimeFigureOut">
               <a:rPr lang="zh-TW" altLang="en-US" smtClean="0"/>
-              <a:t>2026/2/25</a:t>
+              <a:t>2026/2/26</a:t>
             </a:fld>
             <a:endParaRPr lang="zh-TW" altLang="en-US"/>
           </a:p>
@@ -2664,7 +2797,7 @@
           <a:p>
             <a:fld id="{F2A253DC-669B-41BC-84D9-7F457E7088E2}" type="datetimeFigureOut">
               <a:rPr lang="zh-TW" altLang="en-US" smtClean="0"/>
-              <a:t>2026/2/25</a:t>
+              <a:t>2026/2/26</a:t>
             </a:fld>
             <a:endParaRPr lang="zh-TW" altLang="en-US"/>
           </a:p>
@@ -2921,7 +3054,7 @@
           <a:p>
             <a:fld id="{F2A253DC-669B-41BC-84D9-7F457E7088E2}" type="datetimeFigureOut">
               <a:rPr lang="zh-TW" altLang="en-US" smtClean="0"/>
-              <a:t>2026/2/25</a:t>
+              <a:t>2026/2/26</a:t>
             </a:fld>
             <a:endParaRPr lang="zh-TW" altLang="en-US"/>
           </a:p>
@@ -3134,7 +3267,7 @@
           <a:p>
             <a:fld id="{F2A253DC-669B-41BC-84D9-7F457E7088E2}" type="datetimeFigureOut">
               <a:rPr lang="zh-TW" altLang="en-US" smtClean="0"/>
-              <a:t>2026/2/25</a:t>
+              <a:t>2026/2/26</a:t>
             </a:fld>
             <a:endParaRPr lang="zh-TW" altLang="en-US"/>
           </a:p>
@@ -3543,7 +3676,13 @@
     </p:bg>
     <p:spTree>
       <p:nvGrpSpPr>
-        <p:cNvPr id="1" name=""/>
+        <p:cNvPr id="1" name="">
+          <a:extLst>
+            <a:ext uri="{FF2B5EF4-FFF2-40B4-BE49-F238E27FC236}">
+              <a16:creationId xmlns:a16="http://schemas.microsoft.com/office/drawing/2014/main" id="{669C2C1F-63CB-13F4-01F3-B5BBF2C482E4}"/>
+            </a:ext>
+          </a:extLst>
+        </p:cNvPr>
         <p:cNvGrpSpPr/>
         <p:nvPr/>
       </p:nvGrpSpPr>
@@ -3560,7 +3699,7 @@
           <p:cNvPr id="6" name="文字方塊 5">
             <a:extLst>
               <a:ext uri="{FF2B5EF4-FFF2-40B4-BE49-F238E27FC236}">
-                <a16:creationId xmlns:a16="http://schemas.microsoft.com/office/drawing/2014/main" id="{8533C9B8-644A-E095-4F00-1056694C0307}"/>
+                <a16:creationId xmlns:a16="http://schemas.microsoft.com/office/drawing/2014/main" id="{E5DD75EF-7AD2-886D-DE03-77AB6E300F9A}"/>
               </a:ext>
             </a:extLst>
           </p:cNvPr>
@@ -3569,8 +3708,8 @@
         </p:nvSpPr>
         <p:spPr>
           <a:xfrm>
-            <a:off x="1013995" y="764387"/>
-            <a:ext cx="6337445" cy="1015663"/>
+            <a:off x="1057692" y="816882"/>
+            <a:ext cx="4425271" cy="1200329"/>
           </a:xfrm>
           <a:prstGeom prst="rect">
             <a:avLst/>
@@ -3584,14 +3723,14 @@
           <a:lstStyle/>
           <a:p>
             <a:r>
-              <a:rPr lang="zh-TW" altLang="en-US" sz="6000" b="1" dirty="0">
+              <a:rPr lang="zh-TW" altLang="en-US" sz="7200" b="1" dirty="0">
                 <a:solidFill>
                   <a:srgbClr val="F8FAFC"/>
                 </a:solidFill>
                 <a:latin typeface="Noto Sans TC" panose="020B0200000000000000" pitchFamily="34" charset="-120"/>
                 <a:ea typeface="Noto Sans TC" panose="020B0200000000000000" pitchFamily="34" charset="-120"/>
               </a:rPr>
-              <a:t>國小四則運算練習</a:t>
+              <a:t>算你厲害</a:t>
             </a:r>
           </a:p>
         </p:txBody>
@@ -3601,7 +3740,7 @@
           <p:cNvPr id="8" name="文字方塊 7">
             <a:extLst>
               <a:ext uri="{FF2B5EF4-FFF2-40B4-BE49-F238E27FC236}">
-                <a16:creationId xmlns:a16="http://schemas.microsoft.com/office/drawing/2014/main" id="{5C883D44-4570-5649-A65F-8F4076FFC554}"/>
+                <a16:creationId xmlns:a16="http://schemas.microsoft.com/office/drawing/2014/main" id="{B9037C32-9022-3FB6-271C-5D6D627A50B8}"/>
               </a:ext>
             </a:extLst>
           </p:cNvPr>
@@ -3610,8 +3749,8 @@
         </p:nvSpPr>
         <p:spPr>
           <a:xfrm>
-            <a:off x="1057692" y="2298768"/>
-            <a:ext cx="6836628" cy="523220"/>
+            <a:off x="1076546" y="2174044"/>
+            <a:ext cx="6836628" cy="646331"/>
           </a:xfrm>
           <a:prstGeom prst="rect">
             <a:avLst/>
@@ -3625,14 +3764,14 @@
           <a:lstStyle/>
           <a:p>
             <a:r>
-              <a:rPr lang="zh-TW" altLang="en-US" sz="2800" dirty="0">
+              <a:rPr lang="zh-TW" altLang="en-US" sz="3600" dirty="0">
                 <a:solidFill>
                   <a:srgbClr val="E2E8F0"/>
                 </a:solidFill>
                 <a:latin typeface="Noto Sans TC" panose="020B0200000000000000" pitchFamily="34" charset="-120"/>
                 <a:ea typeface="Noto Sans TC" panose="020B0200000000000000" pitchFamily="34" charset="-120"/>
               </a:rPr>
-              <a:t>限時挑戰、血條模式、學習建議一次到位</a:t>
+              <a:t>國小數學四則運算訓練平台</a:t>
             </a:r>
           </a:p>
         </p:txBody>
@@ -3642,7 +3781,7 @@
           <p:cNvPr id="21" name="群組 20">
             <a:extLst>
               <a:ext uri="{FF2B5EF4-FFF2-40B4-BE49-F238E27FC236}">
-                <a16:creationId xmlns:a16="http://schemas.microsoft.com/office/drawing/2014/main" id="{EC365B3F-AC5C-6A22-C879-B1DCE9A008E3}"/>
+                <a16:creationId xmlns:a16="http://schemas.microsoft.com/office/drawing/2014/main" id="{449ABF2D-2A7C-A1C8-B6BB-EBB3BF89E9B9}"/>
               </a:ext>
             </a:extLst>
           </p:cNvPr>
@@ -3662,7 +3801,7 @@
             <p:cNvPr id="4" name="矩形: 圓角 3">
               <a:extLst>
                 <a:ext uri="{FF2B5EF4-FFF2-40B4-BE49-F238E27FC236}">
-                  <a16:creationId xmlns:a16="http://schemas.microsoft.com/office/drawing/2014/main" id="{1A6715BD-F0B1-E964-CF5D-4FE614A2566C}"/>
+                  <a16:creationId xmlns:a16="http://schemas.microsoft.com/office/drawing/2014/main" id="{9969FF1C-2743-B6F0-86EC-37F7308F3491}"/>
                 </a:ext>
               </a:extLst>
             </p:cNvPr>
@@ -3713,7 +3852,7 @@
             <a:p>
               <a:pPr algn="ctr"/>
               <a:r>
-                <a:rPr lang="zh-TW" altLang="en-US" sz="2000" b="1" dirty="0">
+                <a:rPr lang="zh-TW" altLang="en-US" sz="2800" b="1" dirty="0">
                   <a:solidFill>
                     <a:schemeClr val="tx1">
                       <a:lumMod val="85000"/>
@@ -3733,7 +3872,7 @@
             <p:cNvPr id="9" name="矩形: 圓角 8">
               <a:extLst>
                 <a:ext uri="{FF2B5EF4-FFF2-40B4-BE49-F238E27FC236}">
-                  <a16:creationId xmlns:a16="http://schemas.microsoft.com/office/drawing/2014/main" id="{F18748C7-F735-B477-B2C4-5A30E91B1E80}"/>
+                  <a16:creationId xmlns:a16="http://schemas.microsoft.com/office/drawing/2014/main" id="{07E38BC3-1537-E0B1-A4E8-39AC0DF4B6F5}"/>
                 </a:ext>
               </a:extLst>
             </p:cNvPr>
@@ -3784,7 +3923,7 @@
             <a:p>
               <a:pPr algn="ctr"/>
               <a:r>
-                <a:rPr lang="zh-TW" altLang="en-US" sz="2000" b="1" dirty="0">
+                <a:rPr lang="zh-TW" altLang="en-US" sz="2800" b="1" dirty="0">
                   <a:solidFill>
                     <a:schemeClr val="tx1">
                       <a:lumMod val="85000"/>
@@ -3794,7 +3933,7 @@
                   <a:latin typeface="Noto Sans TC" panose="020B0200000000000000" pitchFamily="34" charset="-120"/>
                   <a:ea typeface="Noto Sans TC" panose="020B0200000000000000" pitchFamily="34" charset="-120"/>
                 </a:rPr>
-                <a:t>結果回饋</a:t>
+                <a:t>限時挑戰</a:t>
               </a:r>
             </a:p>
           </p:txBody>
@@ -3804,7 +3943,7 @@
             <p:cNvPr id="10" name="矩形: 圓角 9">
               <a:extLst>
                 <a:ext uri="{FF2B5EF4-FFF2-40B4-BE49-F238E27FC236}">
-                  <a16:creationId xmlns:a16="http://schemas.microsoft.com/office/drawing/2014/main" id="{D57D7D59-FCF9-4905-2306-AA6B57474537}"/>
+                  <a16:creationId xmlns:a16="http://schemas.microsoft.com/office/drawing/2014/main" id="{F15B62A6-941D-D439-BA39-7962715B85C6}"/>
                 </a:ext>
               </a:extLst>
             </p:cNvPr>
@@ -3855,7 +3994,7 @@
             <a:p>
               <a:pPr algn="ctr"/>
               <a:r>
-                <a:rPr lang="en-US" altLang="zh-TW" sz="2000" b="1" dirty="0">
+                <a:rPr lang="zh-TW" altLang="en-US" sz="2800" b="1" dirty="0">
                   <a:solidFill>
                     <a:schemeClr val="tx1">
                       <a:lumMod val="85000"/>
@@ -3865,21 +4004,18 @@
                   <a:latin typeface="Noto Sans TC" panose="020B0200000000000000" pitchFamily="34" charset="-120"/>
                   <a:ea typeface="Noto Sans TC" panose="020B0200000000000000" pitchFamily="34" charset="-120"/>
                 </a:rPr>
-                <a:t>PDF </a:t>
+                <a:t>學習建議</a:t>
               </a:r>
-              <a:r>
-                <a:rPr lang="zh-TW" altLang="en-US" sz="2000" b="1" dirty="0">
-                  <a:solidFill>
-                    <a:schemeClr val="tx1">
-                      <a:lumMod val="85000"/>
-                      <a:lumOff val="15000"/>
-                    </a:schemeClr>
-                  </a:solidFill>
-                  <a:latin typeface="Noto Sans TC" panose="020B0200000000000000" pitchFamily="34" charset="-120"/>
-                  <a:ea typeface="Noto Sans TC" panose="020B0200000000000000" pitchFamily="34" charset="-120"/>
-                </a:rPr>
-                <a:t>留存</a:t>
-              </a:r>
+              <a:endParaRPr lang="en-US" altLang="zh-TW" sz="2800" b="1" dirty="0">
+                <a:solidFill>
+                  <a:schemeClr val="tx1">
+                    <a:lumMod val="85000"/>
+                    <a:lumOff val="15000"/>
+                  </a:schemeClr>
+                </a:solidFill>
+                <a:latin typeface="Noto Sans TC" panose="020B0200000000000000" pitchFamily="34" charset="-120"/>
+                <a:ea typeface="Noto Sans TC" panose="020B0200000000000000" pitchFamily="34" charset="-120"/>
+              </a:endParaRPr>
             </a:p>
           </p:txBody>
         </p:sp>
@@ -3889,7 +4025,7 @@
           <p:cNvPr id="20" name="文字方塊 19">
             <a:extLst>
               <a:ext uri="{FF2B5EF4-FFF2-40B4-BE49-F238E27FC236}">
-                <a16:creationId xmlns:a16="http://schemas.microsoft.com/office/drawing/2014/main" id="{66674A56-3157-B17B-60D7-7C3E2C9FD478}"/>
+                <a16:creationId xmlns:a16="http://schemas.microsoft.com/office/drawing/2014/main" id="{040E75C8-CE0D-FE8B-001E-AC878D620AF2}"/>
               </a:ext>
             </a:extLst>
           </p:cNvPr>
@@ -3898,7 +4034,7 @@
         </p:nvSpPr>
         <p:spPr>
           <a:xfrm>
-            <a:off x="1057692" y="2896565"/>
+            <a:off x="1076546" y="3066364"/>
             <a:ext cx="6179733" cy="523220"/>
           </a:xfrm>
           <a:prstGeom prst="rect">
@@ -3920,7 +4056,7 @@
                 <a:latin typeface="Noto Sans TC" panose="020B0200000000000000" pitchFamily="34" charset="-120"/>
                 <a:ea typeface="Noto Sans TC" panose="020B0200000000000000" pitchFamily="34" charset="-120"/>
               </a:rPr>
-              <a:t>免費使用，手機、平板、電腦都能練</a:t>
+              <a:t>支援手機、平板、電腦，免費練習</a:t>
             </a:r>
           </a:p>
         </p:txBody>
@@ -3930,7 +4066,7 @@
           <p:cNvPr id="13" name="矩形: 圓角 12">
             <a:extLst>
               <a:ext uri="{FF2B5EF4-FFF2-40B4-BE49-F238E27FC236}">
-                <a16:creationId xmlns:a16="http://schemas.microsoft.com/office/drawing/2014/main" id="{4CB63D6D-A810-04C1-24D3-1C1F89992397}"/>
+                <a16:creationId xmlns:a16="http://schemas.microsoft.com/office/drawing/2014/main" id="{B34FF27B-D1F7-242D-458D-4CC34449D135}"/>
               </a:ext>
             </a:extLst>
           </p:cNvPr>
@@ -4243,7 +4379,7 @@
           <p:cNvPr id="50" name="矩形: 圓角 12">
             <a:extLst>
               <a:ext uri="{FF2B5EF4-FFF2-40B4-BE49-F238E27FC236}">
-                <a16:creationId xmlns:a16="http://schemas.microsoft.com/office/drawing/2014/main" id="{9C64234D-AFD5-BCF8-52EE-FFE98C8D3554}"/>
+                <a16:creationId xmlns:a16="http://schemas.microsoft.com/office/drawing/2014/main" id="{A185CD5A-822C-3EA3-BEAF-359B5C12E7F5}"/>
               </a:ext>
             </a:extLst>
           </p:cNvPr>
@@ -4507,9 +4643,8 @@
               </a:path>
             </a:pathLst>
           </a:custGeom>
-          <a:blipFill dpi="0" rotWithShape="1">
+          <a:blipFill>
             <a:blip r:embed="rId3"/>
-            <a:srcRect/>
             <a:stretch>
               <a:fillRect/>
             </a:stretch>
@@ -4549,7 +4684,7 @@
           <p:cNvPr id="51" name="橢圓 50">
             <a:extLst>
               <a:ext uri="{FF2B5EF4-FFF2-40B4-BE49-F238E27FC236}">
-                <a16:creationId xmlns:a16="http://schemas.microsoft.com/office/drawing/2014/main" id="{32404A2E-5A7C-5178-DC63-96BFEF0FDCB7}"/>
+                <a16:creationId xmlns:a16="http://schemas.microsoft.com/office/drawing/2014/main" id="{BC0FB124-3DAF-A230-B3DD-E60C973BC3A5}"/>
               </a:ext>
             </a:extLst>
           </p:cNvPr>
@@ -4602,7 +4737,7 @@
     </p:spTree>
     <p:extLst>
       <p:ext uri="{BB962C8B-B14F-4D97-AF65-F5344CB8AC3E}">
-        <p14:creationId xmlns:p14="http://schemas.microsoft.com/office/powerpoint/2010/main" val="3621886307"/>
+        <p14:creationId xmlns:p14="http://schemas.microsoft.com/office/powerpoint/2010/main" val="1349509751"/>
       </p:ext>
     </p:extLst>
   </p:cSld>
@@ -4636,7 +4771,7 @@
         <p:cNvPr id="1" name="">
           <a:extLst>
             <a:ext uri="{FF2B5EF4-FFF2-40B4-BE49-F238E27FC236}">
-              <a16:creationId xmlns:a16="http://schemas.microsoft.com/office/drawing/2014/main" id="{669C2C1F-63CB-13F4-01F3-B5BBF2C482E4}"/>
+              <a16:creationId xmlns:a16="http://schemas.microsoft.com/office/drawing/2014/main" id="{0F296831-B933-1901-29D9-246D69F83D70}"/>
             </a:ext>
           </a:extLst>
         </p:cNvPr>
@@ -4656,7 +4791,7 @@
           <p:cNvPr id="5" name="矩形 4">
             <a:extLst>
               <a:ext uri="{FF2B5EF4-FFF2-40B4-BE49-F238E27FC236}">
-                <a16:creationId xmlns:a16="http://schemas.microsoft.com/office/drawing/2014/main" id="{B0BC2CA3-B306-AD94-B8E6-D625E4E6E9AA}"/>
+                <a16:creationId xmlns:a16="http://schemas.microsoft.com/office/drawing/2014/main" id="{EFD3130E-010F-E6BB-612E-A5884A8F7404}"/>
               </a:ext>
             </a:extLst>
           </p:cNvPr>
@@ -4708,7 +4843,7 @@
           <p:cNvPr id="6" name="文字方塊 5">
             <a:extLst>
               <a:ext uri="{FF2B5EF4-FFF2-40B4-BE49-F238E27FC236}">
-                <a16:creationId xmlns:a16="http://schemas.microsoft.com/office/drawing/2014/main" id="{E5DD75EF-7AD2-886D-DE03-77AB6E300F9A}"/>
+                <a16:creationId xmlns:a16="http://schemas.microsoft.com/office/drawing/2014/main" id="{CF144C4E-CFB3-FCC3-B586-331C107DA877}"/>
               </a:ext>
             </a:extLst>
           </p:cNvPr>
@@ -4717,8 +4852,8 @@
         </p:nvSpPr>
         <p:spPr>
           <a:xfrm>
-            <a:off x="1013995" y="764387"/>
-            <a:ext cx="6337445" cy="1015663"/>
+            <a:off x="1057692" y="816882"/>
+            <a:ext cx="4425271" cy="1200329"/>
           </a:xfrm>
           <a:prstGeom prst="rect">
             <a:avLst/>
@@ -4732,14 +4867,14 @@
           <a:lstStyle/>
           <a:p>
             <a:r>
-              <a:rPr lang="zh-TW" altLang="en-US" sz="6000" b="1" dirty="0">
+              <a:rPr lang="zh-TW" altLang="en-US" sz="7200" b="1" dirty="0">
                 <a:solidFill>
                   <a:srgbClr val="F8FAFC"/>
                 </a:solidFill>
                 <a:latin typeface="Noto Sans TC" panose="020B0200000000000000" pitchFamily="34" charset="-120"/>
                 <a:ea typeface="Noto Sans TC" panose="020B0200000000000000" pitchFamily="34" charset="-120"/>
               </a:rPr>
-              <a:t>國小四則運算練習</a:t>
+              <a:t>算你厲害</a:t>
             </a:r>
           </a:p>
         </p:txBody>
@@ -4749,7 +4884,7 @@
           <p:cNvPr id="8" name="文字方塊 7">
             <a:extLst>
               <a:ext uri="{FF2B5EF4-FFF2-40B4-BE49-F238E27FC236}">
-                <a16:creationId xmlns:a16="http://schemas.microsoft.com/office/drawing/2014/main" id="{B9037C32-9022-3FB6-271C-5D6D627A50B8}"/>
+                <a16:creationId xmlns:a16="http://schemas.microsoft.com/office/drawing/2014/main" id="{87BA9B5F-348F-A61E-C67B-DC3A15C06A63}"/>
               </a:ext>
             </a:extLst>
           </p:cNvPr>
@@ -4758,8 +4893,8 @@
         </p:nvSpPr>
         <p:spPr>
           <a:xfrm>
-            <a:off x="1057692" y="2298768"/>
-            <a:ext cx="6836628" cy="523220"/>
+            <a:off x="1076546" y="2174044"/>
+            <a:ext cx="6836628" cy="646331"/>
           </a:xfrm>
           <a:prstGeom prst="rect">
             <a:avLst/>
@@ -4773,14 +4908,14 @@
           <a:lstStyle/>
           <a:p>
             <a:r>
-              <a:rPr lang="zh-TW" altLang="en-US" sz="2800" dirty="0">
+              <a:rPr lang="zh-TW" altLang="en-US" sz="3600" dirty="0">
                 <a:solidFill>
                   <a:srgbClr val="E2E8F0"/>
                 </a:solidFill>
                 <a:latin typeface="Noto Sans TC" panose="020B0200000000000000" pitchFamily="34" charset="-120"/>
                 <a:ea typeface="Noto Sans TC" panose="020B0200000000000000" pitchFamily="34" charset="-120"/>
               </a:rPr>
-              <a:t>限時挑戰、血條模式、學習建議一次到位</a:t>
+              <a:t>國小數學四則運算訓練平台</a:t>
             </a:r>
           </a:p>
         </p:txBody>
@@ -4790,7 +4925,7 @@
           <p:cNvPr id="21" name="群組 20">
             <a:extLst>
               <a:ext uri="{FF2B5EF4-FFF2-40B4-BE49-F238E27FC236}">
-                <a16:creationId xmlns:a16="http://schemas.microsoft.com/office/drawing/2014/main" id="{449ABF2D-2A7C-A1C8-B6BB-EBB3BF89E9B9}"/>
+                <a16:creationId xmlns:a16="http://schemas.microsoft.com/office/drawing/2014/main" id="{7D2402D4-7061-EEC6-8D2D-F1CC610CD0C7}"/>
               </a:ext>
             </a:extLst>
           </p:cNvPr>
@@ -4810,7 +4945,7 @@
             <p:cNvPr id="4" name="矩形: 圓角 3">
               <a:extLst>
                 <a:ext uri="{FF2B5EF4-FFF2-40B4-BE49-F238E27FC236}">
-                  <a16:creationId xmlns:a16="http://schemas.microsoft.com/office/drawing/2014/main" id="{9969FF1C-2743-B6F0-86EC-37F7308F3491}"/>
+                  <a16:creationId xmlns:a16="http://schemas.microsoft.com/office/drawing/2014/main" id="{57B6933A-C4E5-9F0C-51C3-35621854165F}"/>
                 </a:ext>
               </a:extLst>
             </p:cNvPr>
@@ -4861,7 +4996,7 @@
             <a:p>
               <a:pPr algn="ctr"/>
               <a:r>
-                <a:rPr lang="zh-TW" altLang="en-US" sz="2000" b="1" dirty="0">
+                <a:rPr lang="zh-TW" altLang="en-US" sz="2800" b="1" dirty="0">
                   <a:solidFill>
                     <a:schemeClr val="tx1">
                       <a:lumMod val="85000"/>
@@ -4881,7 +5016,7 @@
             <p:cNvPr id="9" name="矩形: 圓角 8">
               <a:extLst>
                 <a:ext uri="{FF2B5EF4-FFF2-40B4-BE49-F238E27FC236}">
-                  <a16:creationId xmlns:a16="http://schemas.microsoft.com/office/drawing/2014/main" id="{07E38BC3-1537-E0B1-A4E8-39AC0DF4B6F5}"/>
+                  <a16:creationId xmlns:a16="http://schemas.microsoft.com/office/drawing/2014/main" id="{22F91EEC-53E1-0283-F7E7-4A7A00DDDC9F}"/>
                 </a:ext>
               </a:extLst>
             </p:cNvPr>
@@ -4932,7 +5067,7 @@
             <a:p>
               <a:pPr algn="ctr"/>
               <a:r>
-                <a:rPr lang="zh-TW" altLang="en-US" sz="2000" b="1" dirty="0">
+                <a:rPr lang="zh-TW" altLang="en-US" sz="2800" b="1" dirty="0">
                   <a:solidFill>
                     <a:schemeClr val="tx1">
                       <a:lumMod val="85000"/>
@@ -4942,7 +5077,7 @@
                   <a:latin typeface="Noto Sans TC" panose="020B0200000000000000" pitchFamily="34" charset="-120"/>
                   <a:ea typeface="Noto Sans TC" panose="020B0200000000000000" pitchFamily="34" charset="-120"/>
                 </a:rPr>
-                <a:t>結果回饋</a:t>
+                <a:t>限時挑戰</a:t>
               </a:r>
             </a:p>
           </p:txBody>
@@ -4952,7 +5087,7 @@
             <p:cNvPr id="10" name="矩形: 圓角 9">
               <a:extLst>
                 <a:ext uri="{FF2B5EF4-FFF2-40B4-BE49-F238E27FC236}">
-                  <a16:creationId xmlns:a16="http://schemas.microsoft.com/office/drawing/2014/main" id="{F15B62A6-941D-D439-BA39-7962715B85C6}"/>
+                  <a16:creationId xmlns:a16="http://schemas.microsoft.com/office/drawing/2014/main" id="{A0737FC2-CB52-DA0D-08EA-2B6924BFDC48}"/>
                 </a:ext>
               </a:extLst>
             </p:cNvPr>
@@ -5003,7 +5138,7 @@
             <a:p>
               <a:pPr algn="ctr"/>
               <a:r>
-                <a:rPr lang="en-US" altLang="zh-TW" sz="2000" b="1" dirty="0">
+                <a:rPr lang="zh-TW" altLang="en-US" sz="2800" b="1" dirty="0">
                   <a:solidFill>
                     <a:schemeClr val="tx1">
                       <a:lumMod val="85000"/>
@@ -5013,21 +5148,18 @@
                   <a:latin typeface="Noto Sans TC" panose="020B0200000000000000" pitchFamily="34" charset="-120"/>
                   <a:ea typeface="Noto Sans TC" panose="020B0200000000000000" pitchFamily="34" charset="-120"/>
                 </a:rPr>
-                <a:t>PDF </a:t>
+                <a:t>學習建議</a:t>
               </a:r>
-              <a:r>
-                <a:rPr lang="zh-TW" altLang="en-US" sz="2000" b="1" dirty="0">
-                  <a:solidFill>
-                    <a:schemeClr val="tx1">
-                      <a:lumMod val="85000"/>
-                      <a:lumOff val="15000"/>
-                    </a:schemeClr>
-                  </a:solidFill>
-                  <a:latin typeface="Noto Sans TC" panose="020B0200000000000000" pitchFamily="34" charset="-120"/>
-                  <a:ea typeface="Noto Sans TC" panose="020B0200000000000000" pitchFamily="34" charset="-120"/>
-                </a:rPr>
-                <a:t>留存</a:t>
-              </a:r>
+              <a:endParaRPr lang="en-US" altLang="zh-TW" sz="2800" b="1" dirty="0">
+                <a:solidFill>
+                  <a:schemeClr val="tx1">
+                    <a:lumMod val="85000"/>
+                    <a:lumOff val="15000"/>
+                  </a:schemeClr>
+                </a:solidFill>
+                <a:latin typeface="Noto Sans TC" panose="020B0200000000000000" pitchFamily="34" charset="-120"/>
+                <a:ea typeface="Noto Sans TC" panose="020B0200000000000000" pitchFamily="34" charset="-120"/>
+              </a:endParaRPr>
             </a:p>
           </p:txBody>
         </p:sp>
@@ -5037,7 +5169,7 @@
           <p:cNvPr id="20" name="文字方塊 19">
             <a:extLst>
               <a:ext uri="{FF2B5EF4-FFF2-40B4-BE49-F238E27FC236}">
-                <a16:creationId xmlns:a16="http://schemas.microsoft.com/office/drawing/2014/main" id="{040E75C8-CE0D-FE8B-001E-AC878D620AF2}"/>
+                <a16:creationId xmlns:a16="http://schemas.microsoft.com/office/drawing/2014/main" id="{FEF5E0CA-17EB-801A-CEF7-5DA8EE5D4B24}"/>
               </a:ext>
             </a:extLst>
           </p:cNvPr>
@@ -5046,7 +5178,7 @@
         </p:nvSpPr>
         <p:spPr>
           <a:xfrm>
-            <a:off x="1057692" y="2896565"/>
+            <a:off x="1076546" y="3066364"/>
             <a:ext cx="6179733" cy="523220"/>
           </a:xfrm>
           <a:prstGeom prst="rect">
@@ -5068,7 +5200,7 @@
                 <a:latin typeface="Noto Sans TC" panose="020B0200000000000000" pitchFamily="34" charset="-120"/>
                 <a:ea typeface="Noto Sans TC" panose="020B0200000000000000" pitchFamily="34" charset="-120"/>
               </a:rPr>
-              <a:t>免費使用，手機、平板、電腦都能練</a:t>
+              <a:t>支援手機、平板、電腦，免費練習</a:t>
             </a:r>
           </a:p>
         </p:txBody>
@@ -5078,7 +5210,7 @@
           <p:cNvPr id="13" name="矩形: 圓角 12">
             <a:extLst>
               <a:ext uri="{FF2B5EF4-FFF2-40B4-BE49-F238E27FC236}">
-                <a16:creationId xmlns:a16="http://schemas.microsoft.com/office/drawing/2014/main" id="{B34FF27B-D1F7-242D-458D-4CC34449D135}"/>
+                <a16:creationId xmlns:a16="http://schemas.microsoft.com/office/drawing/2014/main" id="{4C15F9AA-7C18-6202-87DC-A645F6A4F14C}"/>
               </a:ext>
             </a:extLst>
           </p:cNvPr>
@@ -5391,7 +5523,7 @@
           <p:cNvPr id="50" name="矩形: 圓角 12">
             <a:extLst>
               <a:ext uri="{FF2B5EF4-FFF2-40B4-BE49-F238E27FC236}">
-                <a16:creationId xmlns:a16="http://schemas.microsoft.com/office/drawing/2014/main" id="{A185CD5A-822C-3EA3-BEAF-359B5C12E7F5}"/>
+                <a16:creationId xmlns:a16="http://schemas.microsoft.com/office/drawing/2014/main" id="{5591FEAF-0620-B4FD-75DD-AD724EF0D43D}"/>
               </a:ext>
             </a:extLst>
           </p:cNvPr>
@@ -5696,7 +5828,7 @@
           <p:cNvPr id="51" name="橢圓 50">
             <a:extLst>
               <a:ext uri="{FF2B5EF4-FFF2-40B4-BE49-F238E27FC236}">
-                <a16:creationId xmlns:a16="http://schemas.microsoft.com/office/drawing/2014/main" id="{BC0FB124-3DAF-A230-B3DD-E60C973BC3A5}"/>
+                <a16:creationId xmlns:a16="http://schemas.microsoft.com/office/drawing/2014/main" id="{C095D439-D7BB-9CC6-C83E-C20FF37832A6}"/>
               </a:ext>
             </a:extLst>
           </p:cNvPr>
@@ -5749,7 +5881,1154 @@
     </p:spTree>
     <p:extLst>
       <p:ext uri="{BB962C8B-B14F-4D97-AF65-F5344CB8AC3E}">
-        <p14:creationId xmlns:p14="http://schemas.microsoft.com/office/powerpoint/2010/main" val="1349509751"/>
+        <p14:creationId xmlns:p14="http://schemas.microsoft.com/office/powerpoint/2010/main" val="1073099848"/>
+      </p:ext>
+    </p:extLst>
+  </p:cSld>
+  <p:clrMapOvr>
+    <a:masterClrMapping/>
+  </p:clrMapOvr>
+</p:sld>
+</file>
+
+<file path=ppt/slides/slide3.xml><?xml version="1.0" encoding="utf-8"?>
+<p:sld xmlns:a="http://schemas.openxmlformats.org/drawingml/2006/main" xmlns:r="http://schemas.openxmlformats.org/officeDocument/2006/relationships" xmlns:p="http://schemas.openxmlformats.org/presentationml/2006/main">
+  <p:cSld>
+    <p:bg>
+      <p:bgPr>
+        <a:gradFill>
+          <a:gsLst>
+            <a:gs pos="0">
+              <a:srgbClr val="0B3A8F"/>
+            </a:gs>
+            <a:gs pos="100000">
+              <a:srgbClr val="0E7490"/>
+            </a:gs>
+          </a:gsLst>
+          <a:lin ang="2700000" scaled="0"/>
+        </a:gradFill>
+        <a:effectLst/>
+      </p:bgPr>
+    </p:bg>
+    <p:spTree>
+      <p:nvGrpSpPr>
+        <p:cNvPr id="1" name="">
+          <a:extLst>
+            <a:ext uri="{FF2B5EF4-FFF2-40B4-BE49-F238E27FC236}">
+              <a16:creationId xmlns:a16="http://schemas.microsoft.com/office/drawing/2014/main" id="{B10ACD08-98C2-2337-61CD-7103561E0485}"/>
+            </a:ext>
+          </a:extLst>
+        </p:cNvPr>
+        <p:cNvGrpSpPr/>
+        <p:nvPr/>
+      </p:nvGrpSpPr>
+      <p:grpSpPr>
+        <a:xfrm>
+          <a:off x="0" y="0"/>
+          <a:ext cx="0" cy="0"/>
+          <a:chOff x="0" y="0"/>
+          <a:chExt cx="0" cy="0"/>
+        </a:xfrm>
+      </p:grpSpPr>
+      <p:sp>
+        <p:nvSpPr>
+          <p:cNvPr id="5" name="矩形 4">
+            <a:extLst>
+              <a:ext uri="{FF2B5EF4-FFF2-40B4-BE49-F238E27FC236}">
+                <a16:creationId xmlns:a16="http://schemas.microsoft.com/office/drawing/2014/main" id="{2799B3BE-A842-C501-308B-085D0D812ED4}"/>
+              </a:ext>
+            </a:extLst>
+          </p:cNvPr>
+          <p:cNvSpPr/>
+          <p:nvPr/>
+        </p:nvSpPr>
+        <p:spPr>
+          <a:xfrm>
+            <a:off x="641073" y="571500"/>
+            <a:ext cx="10287000" cy="4857750"/>
+          </a:xfrm>
+          <a:prstGeom prst="rect">
+            <a:avLst/>
+          </a:prstGeom>
+          <a:noFill/>
+          <a:ln>
+            <a:solidFill>
+              <a:srgbClr val="FF0000"/>
+            </a:solidFill>
+          </a:ln>
+        </p:spPr>
+        <p:style>
+          <a:lnRef idx="2">
+            <a:schemeClr val="accent1">
+              <a:shade val="15000"/>
+            </a:schemeClr>
+          </a:lnRef>
+          <a:fillRef idx="1">
+            <a:schemeClr val="accent1"/>
+          </a:fillRef>
+          <a:effectRef idx="0">
+            <a:schemeClr val="accent1"/>
+          </a:effectRef>
+          <a:fontRef idx="minor">
+            <a:schemeClr val="lt1"/>
+          </a:fontRef>
+        </p:style>
+        <p:txBody>
+          <a:bodyPr rtlCol="0" anchor="ctr"/>
+          <a:lstStyle/>
+          <a:p>
+            <a:pPr algn="ctr"/>
+            <a:endParaRPr lang="zh-TW" altLang="en-US"/>
+          </a:p>
+        </p:txBody>
+      </p:sp>
+      <p:sp>
+        <p:nvSpPr>
+          <p:cNvPr id="6" name="文字方塊 5">
+            <a:extLst>
+              <a:ext uri="{FF2B5EF4-FFF2-40B4-BE49-F238E27FC236}">
+                <a16:creationId xmlns:a16="http://schemas.microsoft.com/office/drawing/2014/main" id="{CB57AD9D-2709-0EF5-9508-A28027C4D8BE}"/>
+              </a:ext>
+            </a:extLst>
+          </p:cNvPr>
+          <p:cNvSpPr txBox="1"/>
+          <p:nvPr/>
+        </p:nvSpPr>
+        <p:spPr>
+          <a:xfrm>
+            <a:off x="1013995" y="764387"/>
+            <a:ext cx="6337445" cy="1015663"/>
+          </a:xfrm>
+          <a:prstGeom prst="rect">
+            <a:avLst/>
+          </a:prstGeom>
+          <a:noFill/>
+        </p:spPr>
+        <p:txBody>
+          <a:bodyPr wrap="square" rtlCol="0">
+            <a:spAutoFit/>
+          </a:bodyPr>
+          <a:lstStyle/>
+          <a:p>
+            <a:r>
+              <a:rPr lang="zh-TW" altLang="en-US" sz="6000" b="1" dirty="0">
+                <a:solidFill>
+                  <a:srgbClr val="F8FAFC"/>
+                </a:solidFill>
+                <a:latin typeface="Noto Sans TC" panose="020B0200000000000000" pitchFamily="34" charset="-120"/>
+                <a:ea typeface="Noto Sans TC" panose="020B0200000000000000" pitchFamily="34" charset="-120"/>
+              </a:rPr>
+              <a:t>國小四則運算練習</a:t>
+            </a:r>
+          </a:p>
+        </p:txBody>
+      </p:sp>
+      <p:sp>
+        <p:nvSpPr>
+          <p:cNvPr id="8" name="文字方塊 7">
+            <a:extLst>
+              <a:ext uri="{FF2B5EF4-FFF2-40B4-BE49-F238E27FC236}">
+                <a16:creationId xmlns:a16="http://schemas.microsoft.com/office/drawing/2014/main" id="{6F351C16-3BFB-9F4E-DF2A-53EE1A8EB358}"/>
+              </a:ext>
+            </a:extLst>
+          </p:cNvPr>
+          <p:cNvSpPr txBox="1"/>
+          <p:nvPr/>
+        </p:nvSpPr>
+        <p:spPr>
+          <a:xfrm>
+            <a:off x="1057692" y="2298768"/>
+            <a:ext cx="6836628" cy="523220"/>
+          </a:xfrm>
+          <a:prstGeom prst="rect">
+            <a:avLst/>
+          </a:prstGeom>
+          <a:noFill/>
+        </p:spPr>
+        <p:txBody>
+          <a:bodyPr wrap="square" rtlCol="0">
+            <a:spAutoFit/>
+          </a:bodyPr>
+          <a:lstStyle/>
+          <a:p>
+            <a:r>
+              <a:rPr lang="zh-TW" altLang="en-US" sz="2800" dirty="0">
+                <a:solidFill>
+                  <a:srgbClr val="E2E8F0"/>
+                </a:solidFill>
+                <a:latin typeface="Noto Sans TC" panose="020B0200000000000000" pitchFamily="34" charset="-120"/>
+                <a:ea typeface="Noto Sans TC" panose="020B0200000000000000" pitchFamily="34" charset="-120"/>
+              </a:rPr>
+              <a:t>限時挑戰、血條模式、學習建議一次到位</a:t>
+            </a:r>
+          </a:p>
+        </p:txBody>
+      </p:sp>
+      <p:grpSp>
+        <p:nvGrpSpPr>
+          <p:cNvPr id="21" name="群組 20">
+            <a:extLst>
+              <a:ext uri="{FF2B5EF4-FFF2-40B4-BE49-F238E27FC236}">
+                <a16:creationId xmlns:a16="http://schemas.microsoft.com/office/drawing/2014/main" id="{220A51C1-C4C0-0AB2-1F00-CF17EA99039F}"/>
+              </a:ext>
+            </a:extLst>
+          </p:cNvPr>
+          <p:cNvGrpSpPr/>
+          <p:nvPr/>
+        </p:nvGrpSpPr>
+        <p:grpSpPr>
+          <a:xfrm>
+            <a:off x="1057692" y="4189273"/>
+            <a:ext cx="5963915" cy="593112"/>
+            <a:chOff x="1507776" y="2696068"/>
+            <a:chExt cx="4597311" cy="457203"/>
+          </a:xfrm>
+        </p:grpSpPr>
+        <p:sp>
+          <p:nvSpPr>
+            <p:cNvPr id="4" name="矩形: 圓角 3">
+              <a:extLst>
+                <a:ext uri="{FF2B5EF4-FFF2-40B4-BE49-F238E27FC236}">
+                  <a16:creationId xmlns:a16="http://schemas.microsoft.com/office/drawing/2014/main" id="{AC405B8E-D1F2-B1E3-5D6B-0F942CAE2801}"/>
+                </a:ext>
+              </a:extLst>
+            </p:cNvPr>
+            <p:cNvSpPr>
+              <a:spLocks noChangeAspect="1"/>
+            </p:cNvSpPr>
+            <p:nvPr/>
+          </p:nvSpPr>
+          <p:spPr>
+            <a:xfrm>
+              <a:off x="1507776" y="2696068"/>
+              <a:ext cx="1412666" cy="457200"/>
+            </a:xfrm>
+            <a:prstGeom prst="roundRect">
+              <a:avLst>
+                <a:gd name="adj" fmla="val 50000"/>
+              </a:avLst>
+            </a:prstGeom>
+            <a:solidFill>
+              <a:schemeClr val="accent1">
+                <a:lumMod val="40000"/>
+                <a:lumOff val="60000"/>
+              </a:schemeClr>
+            </a:solidFill>
+            <a:ln>
+              <a:noFill/>
+            </a:ln>
+          </p:spPr>
+          <p:style>
+            <a:lnRef idx="2">
+              <a:schemeClr val="accent1">
+                <a:shade val="15000"/>
+              </a:schemeClr>
+            </a:lnRef>
+            <a:fillRef idx="1">
+              <a:schemeClr val="accent1"/>
+            </a:fillRef>
+            <a:effectRef idx="0">
+              <a:schemeClr val="accent1"/>
+            </a:effectRef>
+            <a:fontRef idx="minor">
+              <a:schemeClr val="lt1"/>
+            </a:fontRef>
+          </p:style>
+          <p:txBody>
+            <a:bodyPr rtlCol="0" anchor="ctr"/>
+            <a:lstStyle/>
+            <a:p>
+              <a:pPr algn="ctr"/>
+              <a:r>
+                <a:rPr lang="zh-TW" altLang="en-US" sz="2000" b="1" dirty="0">
+                  <a:solidFill>
+                    <a:schemeClr val="tx1">
+                      <a:lumMod val="85000"/>
+                      <a:lumOff val="15000"/>
+                    </a:schemeClr>
+                  </a:solidFill>
+                  <a:latin typeface="Noto Sans TC" panose="020B0200000000000000" pitchFamily="34" charset="-120"/>
+                  <a:ea typeface="Noto Sans TC" panose="020B0200000000000000" pitchFamily="34" charset="-120"/>
+                </a:rPr>
+                <a:t>自訂難度</a:t>
+              </a:r>
+            </a:p>
+          </p:txBody>
+        </p:sp>
+        <p:sp>
+          <p:nvSpPr>
+            <p:cNvPr id="9" name="矩形: 圓角 8">
+              <a:extLst>
+                <a:ext uri="{FF2B5EF4-FFF2-40B4-BE49-F238E27FC236}">
+                  <a16:creationId xmlns:a16="http://schemas.microsoft.com/office/drawing/2014/main" id="{58EB01FD-E98E-3081-7F51-52FF37BE00C0}"/>
+                </a:ext>
+              </a:extLst>
+            </p:cNvPr>
+            <p:cNvSpPr>
+              <a:spLocks noChangeAspect="1"/>
+            </p:cNvSpPr>
+            <p:nvPr/>
+          </p:nvSpPr>
+          <p:spPr>
+            <a:xfrm>
+              <a:off x="3100099" y="2696068"/>
+              <a:ext cx="1412666" cy="457200"/>
+            </a:xfrm>
+            <a:prstGeom prst="roundRect">
+              <a:avLst>
+                <a:gd name="adj" fmla="val 50000"/>
+              </a:avLst>
+            </a:prstGeom>
+            <a:solidFill>
+              <a:schemeClr val="accent1">
+                <a:lumMod val="40000"/>
+                <a:lumOff val="60000"/>
+              </a:schemeClr>
+            </a:solidFill>
+            <a:ln>
+              <a:noFill/>
+            </a:ln>
+          </p:spPr>
+          <p:style>
+            <a:lnRef idx="2">
+              <a:schemeClr val="accent1">
+                <a:shade val="15000"/>
+              </a:schemeClr>
+            </a:lnRef>
+            <a:fillRef idx="1">
+              <a:schemeClr val="accent1"/>
+            </a:fillRef>
+            <a:effectRef idx="0">
+              <a:schemeClr val="accent1"/>
+            </a:effectRef>
+            <a:fontRef idx="minor">
+              <a:schemeClr val="lt1"/>
+            </a:fontRef>
+          </p:style>
+          <p:txBody>
+            <a:bodyPr rtlCol="0" anchor="ctr"/>
+            <a:lstStyle/>
+            <a:p>
+              <a:pPr algn="ctr"/>
+              <a:r>
+                <a:rPr lang="zh-TW" altLang="en-US" sz="2000" b="1" dirty="0">
+                  <a:solidFill>
+                    <a:schemeClr val="tx1">
+                      <a:lumMod val="85000"/>
+                      <a:lumOff val="15000"/>
+                    </a:schemeClr>
+                  </a:solidFill>
+                  <a:latin typeface="Noto Sans TC" panose="020B0200000000000000" pitchFamily="34" charset="-120"/>
+                  <a:ea typeface="Noto Sans TC" panose="020B0200000000000000" pitchFamily="34" charset="-120"/>
+                </a:rPr>
+                <a:t>結果回饋</a:t>
+              </a:r>
+            </a:p>
+          </p:txBody>
+        </p:sp>
+        <p:sp>
+          <p:nvSpPr>
+            <p:cNvPr id="10" name="矩形: 圓角 9">
+              <a:extLst>
+                <a:ext uri="{FF2B5EF4-FFF2-40B4-BE49-F238E27FC236}">
+                  <a16:creationId xmlns:a16="http://schemas.microsoft.com/office/drawing/2014/main" id="{B42948D6-9629-E969-C5D3-7880A3D09B9E}"/>
+                </a:ext>
+              </a:extLst>
+            </p:cNvPr>
+            <p:cNvSpPr>
+              <a:spLocks noChangeAspect="1"/>
+            </p:cNvSpPr>
+            <p:nvPr/>
+          </p:nvSpPr>
+          <p:spPr>
+            <a:xfrm>
+              <a:off x="4692421" y="2696071"/>
+              <a:ext cx="1412666" cy="457200"/>
+            </a:xfrm>
+            <a:prstGeom prst="roundRect">
+              <a:avLst>
+                <a:gd name="adj" fmla="val 50000"/>
+              </a:avLst>
+            </a:prstGeom>
+            <a:solidFill>
+              <a:schemeClr val="accent1">
+                <a:lumMod val="40000"/>
+                <a:lumOff val="60000"/>
+              </a:schemeClr>
+            </a:solidFill>
+            <a:ln>
+              <a:noFill/>
+            </a:ln>
+          </p:spPr>
+          <p:style>
+            <a:lnRef idx="2">
+              <a:schemeClr val="accent1">
+                <a:shade val="15000"/>
+              </a:schemeClr>
+            </a:lnRef>
+            <a:fillRef idx="1">
+              <a:schemeClr val="accent1"/>
+            </a:fillRef>
+            <a:effectRef idx="0">
+              <a:schemeClr val="accent1"/>
+            </a:effectRef>
+            <a:fontRef idx="minor">
+              <a:schemeClr val="lt1"/>
+            </a:fontRef>
+          </p:style>
+          <p:txBody>
+            <a:bodyPr rtlCol="0" anchor="ctr"/>
+            <a:lstStyle/>
+            <a:p>
+              <a:pPr algn="ctr"/>
+              <a:r>
+                <a:rPr lang="en-US" altLang="zh-TW" sz="2000" b="1" dirty="0">
+                  <a:solidFill>
+                    <a:schemeClr val="tx1">
+                      <a:lumMod val="85000"/>
+                      <a:lumOff val="15000"/>
+                    </a:schemeClr>
+                  </a:solidFill>
+                  <a:latin typeface="Noto Sans TC" panose="020B0200000000000000" pitchFamily="34" charset="-120"/>
+                  <a:ea typeface="Noto Sans TC" panose="020B0200000000000000" pitchFamily="34" charset="-120"/>
+                </a:rPr>
+                <a:t>PDF </a:t>
+              </a:r>
+              <a:r>
+                <a:rPr lang="zh-TW" altLang="en-US" sz="2000" b="1" dirty="0">
+                  <a:solidFill>
+                    <a:schemeClr val="tx1">
+                      <a:lumMod val="85000"/>
+                      <a:lumOff val="15000"/>
+                    </a:schemeClr>
+                  </a:solidFill>
+                  <a:latin typeface="Noto Sans TC" panose="020B0200000000000000" pitchFamily="34" charset="-120"/>
+                  <a:ea typeface="Noto Sans TC" panose="020B0200000000000000" pitchFamily="34" charset="-120"/>
+                </a:rPr>
+                <a:t>留存</a:t>
+              </a:r>
+            </a:p>
+          </p:txBody>
+        </p:sp>
+      </p:grpSp>
+      <p:sp>
+        <p:nvSpPr>
+          <p:cNvPr id="20" name="文字方塊 19">
+            <a:extLst>
+              <a:ext uri="{FF2B5EF4-FFF2-40B4-BE49-F238E27FC236}">
+                <a16:creationId xmlns:a16="http://schemas.microsoft.com/office/drawing/2014/main" id="{69A5B868-0388-CCCA-7627-6CD753916109}"/>
+              </a:ext>
+            </a:extLst>
+          </p:cNvPr>
+          <p:cNvSpPr txBox="1"/>
+          <p:nvPr/>
+        </p:nvSpPr>
+        <p:spPr>
+          <a:xfrm>
+            <a:off x="1057692" y="2896565"/>
+            <a:ext cx="6179733" cy="523220"/>
+          </a:xfrm>
+          <a:prstGeom prst="rect">
+            <a:avLst/>
+          </a:prstGeom>
+          <a:noFill/>
+        </p:spPr>
+        <p:txBody>
+          <a:bodyPr wrap="square" rtlCol="0">
+            <a:spAutoFit/>
+          </a:bodyPr>
+          <a:lstStyle/>
+          <a:p>
+            <a:r>
+              <a:rPr lang="zh-TW" altLang="en-US" sz="2800" dirty="0">
+                <a:solidFill>
+                  <a:srgbClr val="E2E8F0"/>
+                </a:solidFill>
+                <a:latin typeface="Noto Sans TC" panose="020B0200000000000000" pitchFamily="34" charset="-120"/>
+                <a:ea typeface="Noto Sans TC" panose="020B0200000000000000" pitchFamily="34" charset="-120"/>
+              </a:rPr>
+              <a:t>免費使用，手機、平板、電腦都能練</a:t>
+            </a:r>
+          </a:p>
+        </p:txBody>
+      </p:sp>
+      <p:sp>
+        <p:nvSpPr>
+          <p:cNvPr id="13" name="矩形: 圓角 12">
+            <a:extLst>
+              <a:ext uri="{FF2B5EF4-FFF2-40B4-BE49-F238E27FC236}">
+                <a16:creationId xmlns:a16="http://schemas.microsoft.com/office/drawing/2014/main" id="{2A40CEF3-40DA-41AE-5362-1E8230481747}"/>
+              </a:ext>
+            </a:extLst>
+          </p:cNvPr>
+          <p:cNvSpPr/>
+          <p:nvPr/>
+        </p:nvSpPr>
+        <p:spPr>
+          <a:xfrm rot="847998">
+            <a:off x="7656456" y="1089655"/>
+            <a:ext cx="2709825" cy="4687756"/>
+          </a:xfrm>
+          <a:custGeom>
+            <a:avLst/>
+            <a:gdLst>
+              <a:gd name="csX0" fmla="*/ 0 w 2696505"/>
+              <a:gd name="csY0" fmla="*/ 449426 h 3141805"/>
+              <a:gd name="csX1" fmla="*/ 449426 w 2696505"/>
+              <a:gd name="csY1" fmla="*/ 0 h 3141805"/>
+              <a:gd name="csX2" fmla="*/ 2247079 w 2696505"/>
+              <a:gd name="csY2" fmla="*/ 0 h 3141805"/>
+              <a:gd name="csX3" fmla="*/ 2696505 w 2696505"/>
+              <a:gd name="csY3" fmla="*/ 449426 h 3141805"/>
+              <a:gd name="csX4" fmla="*/ 2696505 w 2696505"/>
+              <a:gd name="csY4" fmla="*/ 2692379 h 3141805"/>
+              <a:gd name="csX5" fmla="*/ 2247079 w 2696505"/>
+              <a:gd name="csY5" fmla="*/ 3141805 h 3141805"/>
+              <a:gd name="csX6" fmla="*/ 449426 w 2696505"/>
+              <a:gd name="csY6" fmla="*/ 3141805 h 3141805"/>
+              <a:gd name="csX7" fmla="*/ 0 w 2696505"/>
+              <a:gd name="csY7" fmla="*/ 2692379 h 3141805"/>
+              <a:gd name="csX8" fmla="*/ 0 w 2696505"/>
+              <a:gd name="csY8" fmla="*/ 449426 h 3141805"/>
+              <a:gd name="csX0" fmla="*/ 0 w 2696505"/>
+              <a:gd name="csY0" fmla="*/ 449426 h 3141805"/>
+              <a:gd name="csX1" fmla="*/ 449426 w 2696505"/>
+              <a:gd name="csY1" fmla="*/ 0 h 3141805"/>
+              <a:gd name="csX2" fmla="*/ 2247079 w 2696505"/>
+              <a:gd name="csY2" fmla="*/ 0 h 3141805"/>
+              <a:gd name="csX3" fmla="*/ 2696505 w 2696505"/>
+              <a:gd name="csY3" fmla="*/ 449426 h 3141805"/>
+              <a:gd name="csX4" fmla="*/ 2696505 w 2696505"/>
+              <a:gd name="csY4" fmla="*/ 2692379 h 3141805"/>
+              <a:gd name="csX5" fmla="*/ 2247079 w 2696505"/>
+              <a:gd name="csY5" fmla="*/ 3141805 h 3141805"/>
+              <a:gd name="csX6" fmla="*/ 0 w 2696505"/>
+              <a:gd name="csY6" fmla="*/ 2692379 h 3141805"/>
+              <a:gd name="csX7" fmla="*/ 0 w 2696505"/>
+              <a:gd name="csY7" fmla="*/ 449426 h 3141805"/>
+              <a:gd name="csX0" fmla="*/ 0 w 2696505"/>
+              <a:gd name="csY0" fmla="*/ 449426 h 2972747"/>
+              <a:gd name="csX1" fmla="*/ 449426 w 2696505"/>
+              <a:gd name="csY1" fmla="*/ 0 h 2972747"/>
+              <a:gd name="csX2" fmla="*/ 2247079 w 2696505"/>
+              <a:gd name="csY2" fmla="*/ 0 h 2972747"/>
+              <a:gd name="csX3" fmla="*/ 2696505 w 2696505"/>
+              <a:gd name="csY3" fmla="*/ 449426 h 2972747"/>
+              <a:gd name="csX4" fmla="*/ 2696505 w 2696505"/>
+              <a:gd name="csY4" fmla="*/ 2692379 h 2972747"/>
+              <a:gd name="csX5" fmla="*/ 0 w 2696505"/>
+              <a:gd name="csY5" fmla="*/ 2692379 h 2972747"/>
+              <a:gd name="csX6" fmla="*/ 0 w 2696505"/>
+              <a:gd name="csY6" fmla="*/ 449426 h 2972747"/>
+              <a:gd name="csX0" fmla="*/ 0 w 2696505"/>
+              <a:gd name="csY0" fmla="*/ 449426 h 2858994"/>
+              <a:gd name="csX1" fmla="*/ 449426 w 2696505"/>
+              <a:gd name="csY1" fmla="*/ 0 h 2858994"/>
+              <a:gd name="csX2" fmla="*/ 2247079 w 2696505"/>
+              <a:gd name="csY2" fmla="*/ 0 h 2858994"/>
+              <a:gd name="csX3" fmla="*/ 2696505 w 2696505"/>
+              <a:gd name="csY3" fmla="*/ 449426 h 2858994"/>
+              <a:gd name="csX4" fmla="*/ 2696505 w 2696505"/>
+              <a:gd name="csY4" fmla="*/ 2692379 h 2858994"/>
+              <a:gd name="csX5" fmla="*/ 0 w 2696505"/>
+              <a:gd name="csY5" fmla="*/ 2692379 h 2858994"/>
+              <a:gd name="csX6" fmla="*/ 0 w 2696505"/>
+              <a:gd name="csY6" fmla="*/ 449426 h 2858994"/>
+              <a:gd name="csX0" fmla="*/ 0 w 2696505"/>
+              <a:gd name="csY0" fmla="*/ 449426 h 2692379"/>
+              <a:gd name="csX1" fmla="*/ 449426 w 2696505"/>
+              <a:gd name="csY1" fmla="*/ 0 h 2692379"/>
+              <a:gd name="csX2" fmla="*/ 2247079 w 2696505"/>
+              <a:gd name="csY2" fmla="*/ 0 h 2692379"/>
+              <a:gd name="csX3" fmla="*/ 2696505 w 2696505"/>
+              <a:gd name="csY3" fmla="*/ 449426 h 2692379"/>
+              <a:gd name="csX4" fmla="*/ 2696505 w 2696505"/>
+              <a:gd name="csY4" fmla="*/ 2692379 h 2692379"/>
+              <a:gd name="csX5" fmla="*/ 0 w 2696505"/>
+              <a:gd name="csY5" fmla="*/ 2692379 h 2692379"/>
+              <a:gd name="csX6" fmla="*/ 0 w 2696505"/>
+              <a:gd name="csY6" fmla="*/ 449426 h 2692379"/>
+              <a:gd name="csX0" fmla="*/ 6236 w 2702741"/>
+              <a:gd name="csY0" fmla="*/ 449426 h 3283941"/>
+              <a:gd name="csX1" fmla="*/ 455662 w 2702741"/>
+              <a:gd name="csY1" fmla="*/ 0 h 3283941"/>
+              <a:gd name="csX2" fmla="*/ 2253315 w 2702741"/>
+              <a:gd name="csY2" fmla="*/ 0 h 3283941"/>
+              <a:gd name="csX3" fmla="*/ 2702741 w 2702741"/>
+              <a:gd name="csY3" fmla="*/ 449426 h 3283941"/>
+              <a:gd name="csX4" fmla="*/ 2702741 w 2702741"/>
+              <a:gd name="csY4" fmla="*/ 2692379 h 3283941"/>
+              <a:gd name="csX5" fmla="*/ 0 w 2702741"/>
+              <a:gd name="csY5" fmla="*/ 3283941 h 3283941"/>
+              <a:gd name="csX6" fmla="*/ 6236 w 2702741"/>
+              <a:gd name="csY6" fmla="*/ 449426 h 3283941"/>
+              <a:gd name="csX0" fmla="*/ 8703 w 2705208"/>
+              <a:gd name="csY0" fmla="*/ 449426 h 4045315"/>
+              <a:gd name="csX1" fmla="*/ 458129 w 2705208"/>
+              <a:gd name="csY1" fmla="*/ 0 h 4045315"/>
+              <a:gd name="csX2" fmla="*/ 2255782 w 2705208"/>
+              <a:gd name="csY2" fmla="*/ 0 h 4045315"/>
+              <a:gd name="csX3" fmla="*/ 2705208 w 2705208"/>
+              <a:gd name="csY3" fmla="*/ 449426 h 4045315"/>
+              <a:gd name="csX4" fmla="*/ 2705208 w 2705208"/>
+              <a:gd name="csY4" fmla="*/ 2692379 h 4045315"/>
+              <a:gd name="csX5" fmla="*/ 0 w 2705208"/>
+              <a:gd name="csY5" fmla="*/ 4045315 h 4045315"/>
+              <a:gd name="csX6" fmla="*/ 8703 w 2705208"/>
+              <a:gd name="csY6" fmla="*/ 449426 h 4045315"/>
+              <a:gd name="csX0" fmla="*/ 8703 w 2705208"/>
+              <a:gd name="csY0" fmla="*/ 449426 h 4045315"/>
+              <a:gd name="csX1" fmla="*/ 458129 w 2705208"/>
+              <a:gd name="csY1" fmla="*/ 0 h 4045315"/>
+              <a:gd name="csX2" fmla="*/ 2255782 w 2705208"/>
+              <a:gd name="csY2" fmla="*/ 0 h 4045315"/>
+              <a:gd name="csX3" fmla="*/ 2705208 w 2705208"/>
+              <a:gd name="csY3" fmla="*/ 449426 h 4045315"/>
+              <a:gd name="csX4" fmla="*/ 2701413 w 2705208"/>
+              <a:gd name="csY4" fmla="*/ 3449197 h 4045315"/>
+              <a:gd name="csX5" fmla="*/ 0 w 2705208"/>
+              <a:gd name="csY5" fmla="*/ 4045315 h 4045315"/>
+              <a:gd name="csX6" fmla="*/ 8703 w 2705208"/>
+              <a:gd name="csY6" fmla="*/ 449426 h 4045315"/>
+              <a:gd name="csX0" fmla="*/ 8703 w 2705208"/>
+              <a:gd name="csY0" fmla="*/ 449426 h 4045315"/>
+              <a:gd name="csX1" fmla="*/ 458129 w 2705208"/>
+              <a:gd name="csY1" fmla="*/ 0 h 4045315"/>
+              <a:gd name="csX2" fmla="*/ 2255782 w 2705208"/>
+              <a:gd name="csY2" fmla="*/ 0 h 4045315"/>
+              <a:gd name="csX3" fmla="*/ 2705208 w 2705208"/>
+              <a:gd name="csY3" fmla="*/ 449426 h 4045315"/>
+              <a:gd name="csX4" fmla="*/ 2697426 w 2705208"/>
+              <a:gd name="csY4" fmla="*/ 3435525 h 4045315"/>
+              <a:gd name="csX5" fmla="*/ 0 w 2705208"/>
+              <a:gd name="csY5" fmla="*/ 4045315 h 4045315"/>
+              <a:gd name="csX6" fmla="*/ 8703 w 2705208"/>
+              <a:gd name="csY6" fmla="*/ 449426 h 4045315"/>
+              <a:gd name="csX0" fmla="*/ 10582 w 2707087"/>
+              <a:gd name="csY0" fmla="*/ 449426 h 4029893"/>
+              <a:gd name="csX1" fmla="*/ 460008 w 2707087"/>
+              <a:gd name="csY1" fmla="*/ 0 h 4029893"/>
+              <a:gd name="csX2" fmla="*/ 2257661 w 2707087"/>
+              <a:gd name="csY2" fmla="*/ 0 h 4029893"/>
+              <a:gd name="csX3" fmla="*/ 2707087 w 2707087"/>
+              <a:gd name="csY3" fmla="*/ 449426 h 4029893"/>
+              <a:gd name="csX4" fmla="*/ 2699305 w 2707087"/>
+              <a:gd name="csY4" fmla="*/ 3435525 h 4029893"/>
+              <a:gd name="csX5" fmla="*/ 0 w 2707087"/>
+              <a:gd name="csY5" fmla="*/ 4029893 h 4029893"/>
+              <a:gd name="csX6" fmla="*/ 10582 w 2707087"/>
+              <a:gd name="csY6" fmla="*/ 449426 h 4029893"/>
+              <a:gd name="csX0" fmla="*/ 10582 w 2707087"/>
+              <a:gd name="csY0" fmla="*/ 449426 h 4029893"/>
+              <a:gd name="csX1" fmla="*/ 460008 w 2707087"/>
+              <a:gd name="csY1" fmla="*/ 0 h 4029893"/>
+              <a:gd name="csX2" fmla="*/ 2257661 w 2707087"/>
+              <a:gd name="csY2" fmla="*/ 0 h 4029893"/>
+              <a:gd name="csX3" fmla="*/ 2707087 w 2707087"/>
+              <a:gd name="csY3" fmla="*/ 449426 h 4029893"/>
+              <a:gd name="csX4" fmla="*/ 2691331 w 2707087"/>
+              <a:gd name="csY4" fmla="*/ 3453089 h 4029893"/>
+              <a:gd name="csX5" fmla="*/ 0 w 2707087"/>
+              <a:gd name="csY5" fmla="*/ 4029893 h 4029893"/>
+              <a:gd name="csX6" fmla="*/ 10582 w 2707087"/>
+              <a:gd name="csY6" fmla="*/ 449426 h 4029893"/>
+              <a:gd name="csX0" fmla="*/ 13320 w 2709825"/>
+              <a:gd name="csY0" fmla="*/ 449426 h 4047450"/>
+              <a:gd name="csX1" fmla="*/ 462746 w 2709825"/>
+              <a:gd name="csY1" fmla="*/ 0 h 4047450"/>
+              <a:gd name="csX2" fmla="*/ 2260399 w 2709825"/>
+              <a:gd name="csY2" fmla="*/ 0 h 4047450"/>
+              <a:gd name="csX3" fmla="*/ 2709825 w 2709825"/>
+              <a:gd name="csY3" fmla="*/ 449426 h 4047450"/>
+              <a:gd name="csX4" fmla="*/ 2694069 w 2709825"/>
+              <a:gd name="csY4" fmla="*/ 3453089 h 4047450"/>
+              <a:gd name="csX5" fmla="*/ 0 w 2709825"/>
+              <a:gd name="csY5" fmla="*/ 4047450 h 4047450"/>
+              <a:gd name="csX6" fmla="*/ 13320 w 2709825"/>
+              <a:gd name="csY6" fmla="*/ 449426 h 4047450"/>
+              <a:gd name="csX0" fmla="*/ 13320 w 2709825"/>
+              <a:gd name="csY0" fmla="*/ 449426 h 4047450"/>
+              <a:gd name="csX1" fmla="*/ 462746 w 2709825"/>
+              <a:gd name="csY1" fmla="*/ 0 h 4047450"/>
+              <a:gd name="csX2" fmla="*/ 2260399 w 2709825"/>
+              <a:gd name="csY2" fmla="*/ 0 h 4047450"/>
+              <a:gd name="csX3" fmla="*/ 2709825 w 2709825"/>
+              <a:gd name="csY3" fmla="*/ 449426 h 4047450"/>
+              <a:gd name="csX4" fmla="*/ 2696860 w 2709825"/>
+              <a:gd name="csY4" fmla="*/ 3462659 h 4047450"/>
+              <a:gd name="csX5" fmla="*/ 0 w 2709825"/>
+              <a:gd name="csY5" fmla="*/ 4047450 h 4047450"/>
+              <a:gd name="csX6" fmla="*/ 13320 w 2709825"/>
+              <a:gd name="csY6" fmla="*/ 449426 h 4047450"/>
+            </a:gdLst>
+            <a:ahLst/>
+            <a:cxnLst>
+              <a:cxn ang="0">
+                <a:pos x="csX0" y="csY0"/>
+              </a:cxn>
+              <a:cxn ang="0">
+                <a:pos x="csX1" y="csY1"/>
+              </a:cxn>
+              <a:cxn ang="0">
+                <a:pos x="csX2" y="csY2"/>
+              </a:cxn>
+              <a:cxn ang="0">
+                <a:pos x="csX3" y="csY3"/>
+              </a:cxn>
+              <a:cxn ang="0">
+                <a:pos x="csX4" y="csY4"/>
+              </a:cxn>
+              <a:cxn ang="0">
+                <a:pos x="csX5" y="csY5"/>
+              </a:cxn>
+              <a:cxn ang="0">
+                <a:pos x="csX6" y="csY6"/>
+              </a:cxn>
+            </a:cxnLst>
+            <a:rect l="l" t="t" r="r" b="b"/>
+            <a:pathLst>
+              <a:path w="2709825" h="4047450">
+                <a:moveTo>
+                  <a:pt x="13320" y="449426"/>
+                </a:moveTo>
+                <a:cubicBezTo>
+                  <a:pt x="13320" y="201215"/>
+                  <a:pt x="214535" y="0"/>
+                  <a:pt x="462746" y="0"/>
+                </a:cubicBezTo>
+                <a:lnTo>
+                  <a:pt x="2260399" y="0"/>
+                </a:lnTo>
+                <a:cubicBezTo>
+                  <a:pt x="2508610" y="0"/>
+                  <a:pt x="2709825" y="201215"/>
+                  <a:pt x="2709825" y="449426"/>
+                </a:cubicBezTo>
+                <a:cubicBezTo>
+                  <a:pt x="2705503" y="1453837"/>
+                  <a:pt x="2701182" y="2458248"/>
+                  <a:pt x="2696860" y="3462659"/>
+                </a:cubicBezTo>
+                <a:lnTo>
+                  <a:pt x="0" y="4047450"/>
+                </a:lnTo>
+                <a:cubicBezTo>
+                  <a:pt x="2079" y="3102612"/>
+                  <a:pt x="11241" y="1394264"/>
+                  <a:pt x="13320" y="449426"/>
+                </a:cubicBezTo>
+                <a:close/>
+              </a:path>
+            </a:pathLst>
+          </a:custGeom>
+          <a:solidFill>
+            <a:schemeClr val="tx1">
+              <a:lumMod val="85000"/>
+              <a:lumOff val="15000"/>
+            </a:schemeClr>
+          </a:solidFill>
+          <a:ln>
+            <a:solidFill>
+              <a:schemeClr val="tx1"/>
+            </a:solidFill>
+          </a:ln>
+          <a:effectLst>
+            <a:outerShdw blurRad="50800" dist="76200" dir="2700000" algn="tl" rotWithShape="0">
+              <a:prstClr val="black">
+                <a:alpha val="40000"/>
+              </a:prstClr>
+            </a:outerShdw>
+          </a:effectLst>
+        </p:spPr>
+        <p:style>
+          <a:lnRef idx="2">
+            <a:schemeClr val="accent1">
+              <a:shade val="15000"/>
+            </a:schemeClr>
+          </a:lnRef>
+          <a:fillRef idx="1">
+            <a:schemeClr val="accent1"/>
+          </a:fillRef>
+          <a:effectRef idx="0">
+            <a:schemeClr val="accent1"/>
+          </a:effectRef>
+          <a:fontRef idx="minor">
+            <a:schemeClr val="lt1"/>
+          </a:fontRef>
+        </p:style>
+        <p:txBody>
+          <a:bodyPr rtlCol="0" anchor="ctr"/>
+          <a:lstStyle/>
+          <a:p>
+            <a:pPr algn="ctr"/>
+            <a:endParaRPr lang="zh-TW" altLang="en-US" dirty="0"/>
+          </a:p>
+        </p:txBody>
+      </p:sp>
+      <p:sp>
+        <p:nvSpPr>
+          <p:cNvPr id="50" name="矩形: 圓角 12">
+            <a:extLst>
+              <a:ext uri="{FF2B5EF4-FFF2-40B4-BE49-F238E27FC236}">
+                <a16:creationId xmlns:a16="http://schemas.microsoft.com/office/drawing/2014/main" id="{31C467A6-168E-A0F4-3CC5-9EB1D9D7A076}"/>
+              </a:ext>
+            </a:extLst>
+          </p:cNvPr>
+          <p:cNvSpPr/>
+          <p:nvPr/>
+        </p:nvSpPr>
+        <p:spPr>
+          <a:xfrm rot="847998">
+            <a:off x="7693130" y="1114093"/>
+            <a:ext cx="2646000" cy="4626000"/>
+          </a:xfrm>
+          <a:custGeom>
+            <a:avLst/>
+            <a:gdLst>
+              <a:gd name="csX0" fmla="*/ 0 w 2696505"/>
+              <a:gd name="csY0" fmla="*/ 449426 h 3141805"/>
+              <a:gd name="csX1" fmla="*/ 449426 w 2696505"/>
+              <a:gd name="csY1" fmla="*/ 0 h 3141805"/>
+              <a:gd name="csX2" fmla="*/ 2247079 w 2696505"/>
+              <a:gd name="csY2" fmla="*/ 0 h 3141805"/>
+              <a:gd name="csX3" fmla="*/ 2696505 w 2696505"/>
+              <a:gd name="csY3" fmla="*/ 449426 h 3141805"/>
+              <a:gd name="csX4" fmla="*/ 2696505 w 2696505"/>
+              <a:gd name="csY4" fmla="*/ 2692379 h 3141805"/>
+              <a:gd name="csX5" fmla="*/ 2247079 w 2696505"/>
+              <a:gd name="csY5" fmla="*/ 3141805 h 3141805"/>
+              <a:gd name="csX6" fmla="*/ 449426 w 2696505"/>
+              <a:gd name="csY6" fmla="*/ 3141805 h 3141805"/>
+              <a:gd name="csX7" fmla="*/ 0 w 2696505"/>
+              <a:gd name="csY7" fmla="*/ 2692379 h 3141805"/>
+              <a:gd name="csX8" fmla="*/ 0 w 2696505"/>
+              <a:gd name="csY8" fmla="*/ 449426 h 3141805"/>
+              <a:gd name="csX0" fmla="*/ 0 w 2696505"/>
+              <a:gd name="csY0" fmla="*/ 449426 h 3141805"/>
+              <a:gd name="csX1" fmla="*/ 449426 w 2696505"/>
+              <a:gd name="csY1" fmla="*/ 0 h 3141805"/>
+              <a:gd name="csX2" fmla="*/ 2247079 w 2696505"/>
+              <a:gd name="csY2" fmla="*/ 0 h 3141805"/>
+              <a:gd name="csX3" fmla="*/ 2696505 w 2696505"/>
+              <a:gd name="csY3" fmla="*/ 449426 h 3141805"/>
+              <a:gd name="csX4" fmla="*/ 2696505 w 2696505"/>
+              <a:gd name="csY4" fmla="*/ 2692379 h 3141805"/>
+              <a:gd name="csX5" fmla="*/ 2247079 w 2696505"/>
+              <a:gd name="csY5" fmla="*/ 3141805 h 3141805"/>
+              <a:gd name="csX6" fmla="*/ 0 w 2696505"/>
+              <a:gd name="csY6" fmla="*/ 2692379 h 3141805"/>
+              <a:gd name="csX7" fmla="*/ 0 w 2696505"/>
+              <a:gd name="csY7" fmla="*/ 449426 h 3141805"/>
+              <a:gd name="csX0" fmla="*/ 0 w 2696505"/>
+              <a:gd name="csY0" fmla="*/ 449426 h 2972747"/>
+              <a:gd name="csX1" fmla="*/ 449426 w 2696505"/>
+              <a:gd name="csY1" fmla="*/ 0 h 2972747"/>
+              <a:gd name="csX2" fmla="*/ 2247079 w 2696505"/>
+              <a:gd name="csY2" fmla="*/ 0 h 2972747"/>
+              <a:gd name="csX3" fmla="*/ 2696505 w 2696505"/>
+              <a:gd name="csY3" fmla="*/ 449426 h 2972747"/>
+              <a:gd name="csX4" fmla="*/ 2696505 w 2696505"/>
+              <a:gd name="csY4" fmla="*/ 2692379 h 2972747"/>
+              <a:gd name="csX5" fmla="*/ 0 w 2696505"/>
+              <a:gd name="csY5" fmla="*/ 2692379 h 2972747"/>
+              <a:gd name="csX6" fmla="*/ 0 w 2696505"/>
+              <a:gd name="csY6" fmla="*/ 449426 h 2972747"/>
+              <a:gd name="csX0" fmla="*/ 0 w 2696505"/>
+              <a:gd name="csY0" fmla="*/ 449426 h 2858994"/>
+              <a:gd name="csX1" fmla="*/ 449426 w 2696505"/>
+              <a:gd name="csY1" fmla="*/ 0 h 2858994"/>
+              <a:gd name="csX2" fmla="*/ 2247079 w 2696505"/>
+              <a:gd name="csY2" fmla="*/ 0 h 2858994"/>
+              <a:gd name="csX3" fmla="*/ 2696505 w 2696505"/>
+              <a:gd name="csY3" fmla="*/ 449426 h 2858994"/>
+              <a:gd name="csX4" fmla="*/ 2696505 w 2696505"/>
+              <a:gd name="csY4" fmla="*/ 2692379 h 2858994"/>
+              <a:gd name="csX5" fmla="*/ 0 w 2696505"/>
+              <a:gd name="csY5" fmla="*/ 2692379 h 2858994"/>
+              <a:gd name="csX6" fmla="*/ 0 w 2696505"/>
+              <a:gd name="csY6" fmla="*/ 449426 h 2858994"/>
+              <a:gd name="csX0" fmla="*/ 0 w 2696505"/>
+              <a:gd name="csY0" fmla="*/ 449426 h 2692379"/>
+              <a:gd name="csX1" fmla="*/ 449426 w 2696505"/>
+              <a:gd name="csY1" fmla="*/ 0 h 2692379"/>
+              <a:gd name="csX2" fmla="*/ 2247079 w 2696505"/>
+              <a:gd name="csY2" fmla="*/ 0 h 2692379"/>
+              <a:gd name="csX3" fmla="*/ 2696505 w 2696505"/>
+              <a:gd name="csY3" fmla="*/ 449426 h 2692379"/>
+              <a:gd name="csX4" fmla="*/ 2696505 w 2696505"/>
+              <a:gd name="csY4" fmla="*/ 2692379 h 2692379"/>
+              <a:gd name="csX5" fmla="*/ 0 w 2696505"/>
+              <a:gd name="csY5" fmla="*/ 2692379 h 2692379"/>
+              <a:gd name="csX6" fmla="*/ 0 w 2696505"/>
+              <a:gd name="csY6" fmla="*/ 449426 h 2692379"/>
+              <a:gd name="csX0" fmla="*/ 6236 w 2702741"/>
+              <a:gd name="csY0" fmla="*/ 449426 h 3283941"/>
+              <a:gd name="csX1" fmla="*/ 455662 w 2702741"/>
+              <a:gd name="csY1" fmla="*/ 0 h 3283941"/>
+              <a:gd name="csX2" fmla="*/ 2253315 w 2702741"/>
+              <a:gd name="csY2" fmla="*/ 0 h 3283941"/>
+              <a:gd name="csX3" fmla="*/ 2702741 w 2702741"/>
+              <a:gd name="csY3" fmla="*/ 449426 h 3283941"/>
+              <a:gd name="csX4" fmla="*/ 2702741 w 2702741"/>
+              <a:gd name="csY4" fmla="*/ 2692379 h 3283941"/>
+              <a:gd name="csX5" fmla="*/ 0 w 2702741"/>
+              <a:gd name="csY5" fmla="*/ 3283941 h 3283941"/>
+              <a:gd name="csX6" fmla="*/ 6236 w 2702741"/>
+              <a:gd name="csY6" fmla="*/ 449426 h 3283941"/>
+              <a:gd name="csX0" fmla="*/ 8703 w 2705208"/>
+              <a:gd name="csY0" fmla="*/ 449426 h 4045315"/>
+              <a:gd name="csX1" fmla="*/ 458129 w 2705208"/>
+              <a:gd name="csY1" fmla="*/ 0 h 4045315"/>
+              <a:gd name="csX2" fmla="*/ 2255782 w 2705208"/>
+              <a:gd name="csY2" fmla="*/ 0 h 4045315"/>
+              <a:gd name="csX3" fmla="*/ 2705208 w 2705208"/>
+              <a:gd name="csY3" fmla="*/ 449426 h 4045315"/>
+              <a:gd name="csX4" fmla="*/ 2705208 w 2705208"/>
+              <a:gd name="csY4" fmla="*/ 2692379 h 4045315"/>
+              <a:gd name="csX5" fmla="*/ 0 w 2705208"/>
+              <a:gd name="csY5" fmla="*/ 4045315 h 4045315"/>
+              <a:gd name="csX6" fmla="*/ 8703 w 2705208"/>
+              <a:gd name="csY6" fmla="*/ 449426 h 4045315"/>
+              <a:gd name="csX0" fmla="*/ 8703 w 2705208"/>
+              <a:gd name="csY0" fmla="*/ 449426 h 4045315"/>
+              <a:gd name="csX1" fmla="*/ 458129 w 2705208"/>
+              <a:gd name="csY1" fmla="*/ 0 h 4045315"/>
+              <a:gd name="csX2" fmla="*/ 2255782 w 2705208"/>
+              <a:gd name="csY2" fmla="*/ 0 h 4045315"/>
+              <a:gd name="csX3" fmla="*/ 2705208 w 2705208"/>
+              <a:gd name="csY3" fmla="*/ 449426 h 4045315"/>
+              <a:gd name="csX4" fmla="*/ 2701413 w 2705208"/>
+              <a:gd name="csY4" fmla="*/ 3449197 h 4045315"/>
+              <a:gd name="csX5" fmla="*/ 0 w 2705208"/>
+              <a:gd name="csY5" fmla="*/ 4045315 h 4045315"/>
+              <a:gd name="csX6" fmla="*/ 8703 w 2705208"/>
+              <a:gd name="csY6" fmla="*/ 449426 h 4045315"/>
+              <a:gd name="csX0" fmla="*/ 8703 w 2705208"/>
+              <a:gd name="csY0" fmla="*/ 449426 h 4045315"/>
+              <a:gd name="csX1" fmla="*/ 458129 w 2705208"/>
+              <a:gd name="csY1" fmla="*/ 0 h 4045315"/>
+              <a:gd name="csX2" fmla="*/ 2255782 w 2705208"/>
+              <a:gd name="csY2" fmla="*/ 0 h 4045315"/>
+              <a:gd name="csX3" fmla="*/ 2705208 w 2705208"/>
+              <a:gd name="csY3" fmla="*/ 449426 h 4045315"/>
+              <a:gd name="csX4" fmla="*/ 2697426 w 2705208"/>
+              <a:gd name="csY4" fmla="*/ 3435525 h 4045315"/>
+              <a:gd name="csX5" fmla="*/ 0 w 2705208"/>
+              <a:gd name="csY5" fmla="*/ 4045315 h 4045315"/>
+              <a:gd name="csX6" fmla="*/ 8703 w 2705208"/>
+              <a:gd name="csY6" fmla="*/ 449426 h 4045315"/>
+              <a:gd name="csX0" fmla="*/ 10582 w 2707087"/>
+              <a:gd name="csY0" fmla="*/ 449426 h 4029893"/>
+              <a:gd name="csX1" fmla="*/ 460008 w 2707087"/>
+              <a:gd name="csY1" fmla="*/ 0 h 4029893"/>
+              <a:gd name="csX2" fmla="*/ 2257661 w 2707087"/>
+              <a:gd name="csY2" fmla="*/ 0 h 4029893"/>
+              <a:gd name="csX3" fmla="*/ 2707087 w 2707087"/>
+              <a:gd name="csY3" fmla="*/ 449426 h 4029893"/>
+              <a:gd name="csX4" fmla="*/ 2699305 w 2707087"/>
+              <a:gd name="csY4" fmla="*/ 3435525 h 4029893"/>
+              <a:gd name="csX5" fmla="*/ 0 w 2707087"/>
+              <a:gd name="csY5" fmla="*/ 4029893 h 4029893"/>
+              <a:gd name="csX6" fmla="*/ 10582 w 2707087"/>
+              <a:gd name="csY6" fmla="*/ 449426 h 4029893"/>
+              <a:gd name="csX0" fmla="*/ 10582 w 2707087"/>
+              <a:gd name="csY0" fmla="*/ 449426 h 4029893"/>
+              <a:gd name="csX1" fmla="*/ 460008 w 2707087"/>
+              <a:gd name="csY1" fmla="*/ 0 h 4029893"/>
+              <a:gd name="csX2" fmla="*/ 2257661 w 2707087"/>
+              <a:gd name="csY2" fmla="*/ 0 h 4029893"/>
+              <a:gd name="csX3" fmla="*/ 2707087 w 2707087"/>
+              <a:gd name="csY3" fmla="*/ 449426 h 4029893"/>
+              <a:gd name="csX4" fmla="*/ 2691331 w 2707087"/>
+              <a:gd name="csY4" fmla="*/ 3453089 h 4029893"/>
+              <a:gd name="csX5" fmla="*/ 0 w 2707087"/>
+              <a:gd name="csY5" fmla="*/ 4029893 h 4029893"/>
+              <a:gd name="csX6" fmla="*/ 10582 w 2707087"/>
+              <a:gd name="csY6" fmla="*/ 449426 h 4029893"/>
+              <a:gd name="csX0" fmla="*/ 13320 w 2709825"/>
+              <a:gd name="csY0" fmla="*/ 449426 h 4047450"/>
+              <a:gd name="csX1" fmla="*/ 462746 w 2709825"/>
+              <a:gd name="csY1" fmla="*/ 0 h 4047450"/>
+              <a:gd name="csX2" fmla="*/ 2260399 w 2709825"/>
+              <a:gd name="csY2" fmla="*/ 0 h 4047450"/>
+              <a:gd name="csX3" fmla="*/ 2709825 w 2709825"/>
+              <a:gd name="csY3" fmla="*/ 449426 h 4047450"/>
+              <a:gd name="csX4" fmla="*/ 2694069 w 2709825"/>
+              <a:gd name="csY4" fmla="*/ 3453089 h 4047450"/>
+              <a:gd name="csX5" fmla="*/ 0 w 2709825"/>
+              <a:gd name="csY5" fmla="*/ 4047450 h 4047450"/>
+              <a:gd name="csX6" fmla="*/ 13320 w 2709825"/>
+              <a:gd name="csY6" fmla="*/ 449426 h 4047450"/>
+              <a:gd name="csX0" fmla="*/ 13320 w 2709825"/>
+              <a:gd name="csY0" fmla="*/ 449426 h 4047450"/>
+              <a:gd name="csX1" fmla="*/ 462746 w 2709825"/>
+              <a:gd name="csY1" fmla="*/ 0 h 4047450"/>
+              <a:gd name="csX2" fmla="*/ 2260399 w 2709825"/>
+              <a:gd name="csY2" fmla="*/ 0 h 4047450"/>
+              <a:gd name="csX3" fmla="*/ 2709825 w 2709825"/>
+              <a:gd name="csY3" fmla="*/ 449426 h 4047450"/>
+              <a:gd name="csX4" fmla="*/ 2696860 w 2709825"/>
+              <a:gd name="csY4" fmla="*/ 3462659 h 4047450"/>
+              <a:gd name="csX5" fmla="*/ 0 w 2709825"/>
+              <a:gd name="csY5" fmla="*/ 4047450 h 4047450"/>
+              <a:gd name="csX6" fmla="*/ 13320 w 2709825"/>
+              <a:gd name="csY6" fmla="*/ 449426 h 4047450"/>
+            </a:gdLst>
+            <a:ahLst/>
+            <a:cxnLst>
+              <a:cxn ang="0">
+                <a:pos x="csX0" y="csY0"/>
+              </a:cxn>
+              <a:cxn ang="0">
+                <a:pos x="csX1" y="csY1"/>
+              </a:cxn>
+              <a:cxn ang="0">
+                <a:pos x="csX2" y="csY2"/>
+              </a:cxn>
+              <a:cxn ang="0">
+                <a:pos x="csX3" y="csY3"/>
+              </a:cxn>
+              <a:cxn ang="0">
+                <a:pos x="csX4" y="csY4"/>
+              </a:cxn>
+              <a:cxn ang="0">
+                <a:pos x="csX5" y="csY5"/>
+              </a:cxn>
+              <a:cxn ang="0">
+                <a:pos x="csX6" y="csY6"/>
+              </a:cxn>
+            </a:cxnLst>
+            <a:rect l="l" t="t" r="r" b="b"/>
+            <a:pathLst>
+              <a:path w="2709825" h="4047450">
+                <a:moveTo>
+                  <a:pt x="13320" y="449426"/>
+                </a:moveTo>
+                <a:cubicBezTo>
+                  <a:pt x="13320" y="201215"/>
+                  <a:pt x="214535" y="0"/>
+                  <a:pt x="462746" y="0"/>
+                </a:cubicBezTo>
+                <a:lnTo>
+                  <a:pt x="2260399" y="0"/>
+                </a:lnTo>
+                <a:cubicBezTo>
+                  <a:pt x="2508610" y="0"/>
+                  <a:pt x="2709825" y="201215"/>
+                  <a:pt x="2709825" y="449426"/>
+                </a:cubicBezTo>
+                <a:cubicBezTo>
+                  <a:pt x="2705503" y="1453837"/>
+                  <a:pt x="2701182" y="2458248"/>
+                  <a:pt x="2696860" y="3462659"/>
+                </a:cubicBezTo>
+                <a:lnTo>
+                  <a:pt x="0" y="4047450"/>
+                </a:lnTo>
+                <a:cubicBezTo>
+                  <a:pt x="2079" y="3102612"/>
+                  <a:pt x="11241" y="1394264"/>
+                  <a:pt x="13320" y="449426"/>
+                </a:cubicBezTo>
+                <a:close/>
+              </a:path>
+            </a:pathLst>
+          </a:custGeom>
+          <a:blipFill>
+            <a:blip r:embed="rId3"/>
+            <a:stretch>
+              <a:fillRect/>
+            </a:stretch>
+          </a:blipFill>
+          <a:ln>
+            <a:noFill/>
+          </a:ln>
+          <a:effectLst/>
+        </p:spPr>
+        <p:style>
+          <a:lnRef idx="2">
+            <a:schemeClr val="accent1">
+              <a:shade val="15000"/>
+            </a:schemeClr>
+          </a:lnRef>
+          <a:fillRef idx="1">
+            <a:schemeClr val="accent1"/>
+          </a:fillRef>
+          <a:effectRef idx="0">
+            <a:schemeClr val="accent1"/>
+          </a:effectRef>
+          <a:fontRef idx="minor">
+            <a:schemeClr val="lt1"/>
+          </a:fontRef>
+        </p:style>
+        <p:txBody>
+          <a:bodyPr rtlCol="0" anchor="ctr"/>
+          <a:lstStyle/>
+          <a:p>
+            <a:pPr algn="ctr"/>
+            <a:endParaRPr lang="zh-TW" altLang="en-US" dirty="0"/>
+          </a:p>
+        </p:txBody>
+      </p:sp>
+      <p:sp>
+        <p:nvSpPr>
+          <p:cNvPr id="51" name="橢圓 50">
+            <a:extLst>
+              <a:ext uri="{FF2B5EF4-FFF2-40B4-BE49-F238E27FC236}">
+                <a16:creationId xmlns:a16="http://schemas.microsoft.com/office/drawing/2014/main" id="{E0D2C770-12E7-FC9D-61CA-EDAFC591066E}"/>
+              </a:ext>
+            </a:extLst>
+          </p:cNvPr>
+          <p:cNvSpPr/>
+          <p:nvPr/>
+        </p:nvSpPr>
+        <p:spPr>
+          <a:xfrm>
+            <a:off x="9499985" y="1291667"/>
+            <a:ext cx="129540" cy="129540"/>
+          </a:xfrm>
+          <a:prstGeom prst="ellipse">
+            <a:avLst/>
+          </a:prstGeom>
+          <a:solidFill>
+            <a:schemeClr val="tx1">
+              <a:lumMod val="85000"/>
+              <a:lumOff val="15000"/>
+            </a:schemeClr>
+          </a:solidFill>
+          <a:ln>
+            <a:noFill/>
+          </a:ln>
+        </p:spPr>
+        <p:style>
+          <a:lnRef idx="2">
+            <a:schemeClr val="accent1">
+              <a:shade val="15000"/>
+            </a:schemeClr>
+          </a:lnRef>
+          <a:fillRef idx="1">
+            <a:schemeClr val="accent1"/>
+          </a:fillRef>
+          <a:effectRef idx="0">
+            <a:schemeClr val="accent1"/>
+          </a:effectRef>
+          <a:fontRef idx="minor">
+            <a:schemeClr val="lt1"/>
+          </a:fontRef>
+        </p:style>
+        <p:txBody>
+          <a:bodyPr rtlCol="0" anchor="ctr"/>
+          <a:lstStyle/>
+          <a:p>
+            <a:pPr algn="ctr"/>
+            <a:endParaRPr lang="zh-TW" altLang="en-US"/>
+          </a:p>
+        </p:txBody>
+      </p:sp>
+    </p:spTree>
+    <p:extLst>
+      <p:ext uri="{BB962C8B-B14F-4D97-AF65-F5344CB8AC3E}">
+        <p14:creationId xmlns:p14="http://schemas.microsoft.com/office/powerpoint/2010/main" val="3069624418"/>
       </p:ext>
     </p:extLst>
   </p:cSld>
